--- a/Machine Learning Models - trailer.pptx
+++ b/Machine Learning Models - trailer.pptx
@@ -5,19 +5,18 @@
     <p:sldMasterId id="2147483679" r:id="rId4"/>
   </p:sldMasterIdLst>
   <p:notesMasterIdLst>
-    <p:notesMasterId r:id="rId10"/>
+    <p:notesMasterId r:id="rId9"/>
   </p:notesMasterIdLst>
   <p:sldIdLst>
     <p:sldId id="256" r:id="rId5"/>
     <p:sldId id="257" r:id="rId6"/>
     <p:sldId id="260" r:id="rId7"/>
-    <p:sldId id="258" r:id="rId8"/>
-    <p:sldId id="259" r:id="rId9"/>
+    <p:sldId id="259" r:id="rId8"/>
   </p:sldIdLst>
   <p:sldSz cx="9144000" cy="6858000" type="screen4x3"/>
   <p:notesSz cx="6858000" cy="9144000"/>
   <p:custDataLst>
-    <p:tags r:id="rId11"/>
+    <p:tags r:id="rId10"/>
   </p:custDataLst>
   <p:defaultTextStyle>
     <a:defPPr>
@@ -146,7 +145,7 @@
   </p:defaultTextStyle>
   <p:extLst>
     <p:ext uri="{EFAFB233-063F-42B5-8137-9DF3F51BA10A}">
-      <p15:sldGuideLst xmlns:p15="http://schemas.microsoft.com/office/powerpoint/2012/main" xmlns="">
+      <p15:sldGuideLst xmlns="" xmlns:p15="http://schemas.microsoft.com/office/powerpoint/2012/main">
         <p15:guide id="1" orient="horz" pos="2160">
           <p15:clr>
             <a:srgbClr val="A4A3A4"/>
@@ -251,7 +250,7 @@
           <a:p>
             <a:fld id="{90072532-2365-4550-8B7C-814F0932B43A}" type="datetimeFigureOut">
               <a:rPr lang="en-US" smtClean="0"/>
-              <a:t>4/19/2018</a:t>
+              <a:t>6/19/2018</a:t>
             </a:fld>
             <a:endParaRPr lang="en-US"/>
           </a:p>
@@ -602,65 +601,6 @@
       </p:sp>
       <p:sp>
         <p:nvSpPr>
-          <p:cNvPr id="4" name="LegalEntity"/>
-          <p:cNvSpPr>
-            <a:spLocks noGrp="1"/>
-          </p:cNvSpPr>
-          <p:nvPr>
-            <p:ph type="body" sz="quarter" idx="13" hasCustomPrompt="1"/>
-          </p:nvPr>
-        </p:nvSpPr>
-        <p:spPr>
-          <a:xfrm>
-            <a:off x="5842800" y="4546800"/>
-            <a:ext cx="2880000" cy="208800"/>
-          </a:xfrm>
-          <a:prstGeom prst="rect">
-            <a:avLst/>
-          </a:prstGeom>
-        </p:spPr>
-        <p:txBody>
-          <a:bodyPr lIns="0" tIns="0" rIns="0" bIns="0">
-            <a:noAutofit/>
-          </a:bodyPr>
-          <a:lstStyle>
-            <a:lvl1pPr marL="0" indent="0" algn="r">
-              <a:buFontTx/>
-              <a:buNone/>
-              <a:defRPr sz="1200"/>
-            </a:lvl1pPr>
-            <a:lvl2pPr marL="475200" indent="0" algn="r">
-              <a:buFontTx/>
-              <a:buNone/>
-              <a:defRPr sz="1200"/>
-            </a:lvl2pPr>
-            <a:lvl3pPr algn="r">
-              <a:buFontTx/>
-              <a:buNone/>
-              <a:defRPr sz="1200"/>
-            </a:lvl3pPr>
-            <a:lvl4pPr marL="1425600" indent="0" algn="r">
-              <a:buFontTx/>
-              <a:buNone/>
-              <a:defRPr sz="1200"/>
-            </a:lvl4pPr>
-            <a:lvl5pPr marL="2001600" indent="0" algn="r">
-              <a:buFontTx/>
-              <a:buNone/>
-              <a:defRPr sz="1200"/>
-            </a:lvl5pPr>
-          </a:lstStyle>
-          <a:p>
-            <a:pPr lvl="0"/>
-            <a:r>
-              <a:rPr lang="en-GB" noProof="0" dirty="0"/>
-              <a:t>[Insert legal entity - classification level]</a:t>
-            </a:r>
-          </a:p>
-        </p:txBody>
-      </p:sp>
-      <p:sp>
-        <p:nvSpPr>
           <p:cNvPr id="7" name="CityDate"/>
           <p:cNvSpPr>
             <a:spLocks noGrp="1"/>
@@ -874,7 +814,7 @@
       </p:sp>
       <p:pic>
         <p:nvPicPr>
-          <p:cNvPr id="2" name="Picture 1"/>
+          <p:cNvPr id="6" name="Logo"/>
           <p:cNvPicPr>
             <a:picLocks noChangeAspect="1"/>
           </p:cNvPicPr>
@@ -882,36 +822,6 @@
         </p:nvPicPr>
         <p:blipFill>
           <a:blip r:embed="rId2" cstate="print">
-            <a:extLst>
-              <a:ext uri="{28A0092B-C50C-407E-A947-70E740481C1C}">
-                <a14:useLocalDpi xmlns:a14="http://schemas.microsoft.com/office/drawing/2010/main" val="0"/>
-              </a:ext>
-            </a:extLst>
-          </a:blip>
-          <a:stretch>
-            <a:fillRect/>
-          </a:stretch>
-        </p:blipFill>
-        <p:spPr>
-          <a:xfrm>
-            <a:off x="7754400" y="432000"/>
-            <a:ext cx="972225" cy="1072800"/>
-          </a:xfrm>
-          <a:prstGeom prst="rect">
-            <a:avLst/>
-          </a:prstGeom>
-        </p:spPr>
-      </p:pic>
-      <p:pic>
-        <p:nvPicPr>
-          <p:cNvPr id="6" name="Logo"/>
-          <p:cNvPicPr>
-            <a:picLocks noChangeAspect="1"/>
-          </p:cNvPicPr>
-          <p:nvPr userDrawn="1"/>
-        </p:nvPicPr>
-        <p:blipFill>
-          <a:blip r:embed="rId3" cstate="print">
             <a:extLst>
               <a:ext uri="{28A0092B-C50C-407E-A947-70E740481C1C}">
                 <a14:useLocalDpi xmlns:a14="http://schemas.microsoft.com/office/drawing/2010/main" val="0"/>
@@ -1069,99 +979,6 @@
       </p:sp>
       <p:sp>
         <p:nvSpPr>
-          <p:cNvPr id="13" name="LegalEntity"/>
-          <p:cNvSpPr>
-            <a:spLocks noGrp="1"/>
-          </p:cNvSpPr>
-          <p:nvPr>
-            <p:ph type="body" sz="quarter" idx="14" hasCustomPrompt="1"/>
-          </p:nvPr>
-        </p:nvSpPr>
-        <p:spPr>
-          <a:xfrm>
-            <a:off x="5842800" y="4546800"/>
-            <a:ext cx="2880000" cy="208800"/>
-          </a:xfrm>
-          <a:prstGeom prst="rect">
-            <a:avLst/>
-          </a:prstGeom>
-        </p:spPr>
-        <p:txBody>
-          <a:bodyPr lIns="0" tIns="0" rIns="0" bIns="0">
-            <a:noAutofit/>
-          </a:bodyPr>
-          <a:lstStyle>
-            <a:lvl1pPr marL="0" marR="0" indent="0" algn="r" defTabSz="342875" rtl="0" eaLnBrk="1" fontAlgn="auto" latinLnBrk="0" hangingPunct="1">
-              <a:lnSpc>
-                <a:spcPct val="100000"/>
-              </a:lnSpc>
-              <a:spcBef>
-                <a:spcPct val="20000"/>
-              </a:spcBef>
-              <a:spcAft>
-                <a:spcPts val="0"/>
-              </a:spcAft>
-              <a:buClr>
-                <a:srgbClr val="E1061C"/>
-              </a:buClr>
-              <a:buSzTx/>
-              <a:buFontTx/>
-              <a:buNone/>
-              <a:tabLst/>
-              <a:defRPr sz="1200">
-                <a:latin typeface="+mn-lt"/>
-              </a:defRPr>
-            </a:lvl1pPr>
-            <a:lvl2pPr marL="475200" indent="0" algn="r">
-              <a:buFontTx/>
-              <a:buNone/>
-              <a:defRPr sz="1200"/>
-            </a:lvl2pPr>
-            <a:lvl3pPr algn="r">
-              <a:buFontTx/>
-              <a:buNone/>
-              <a:defRPr sz="1200"/>
-            </a:lvl3pPr>
-            <a:lvl4pPr marL="1425600" indent="0" algn="r">
-              <a:buFontTx/>
-              <a:buNone/>
-              <a:defRPr sz="1200"/>
-            </a:lvl4pPr>
-            <a:lvl5pPr marL="2001600" indent="0" algn="r">
-              <a:buFontTx/>
-              <a:buNone/>
-              <a:defRPr sz="1200"/>
-            </a:lvl5pPr>
-          </a:lstStyle>
-          <a:p>
-            <a:pPr marL="0" marR="0" lvl="0" indent="0" algn="r" defTabSz="342875" rtl="0" eaLnBrk="1" fontAlgn="auto" latinLnBrk="0" hangingPunct="1">
-              <a:lnSpc>
-                <a:spcPct val="100000"/>
-              </a:lnSpc>
-              <a:spcBef>
-                <a:spcPct val="20000"/>
-              </a:spcBef>
-              <a:spcAft>
-                <a:spcPts val="0"/>
-              </a:spcAft>
-              <a:buClr>
-                <a:srgbClr val="E1061C"/>
-              </a:buClr>
-              <a:buSzTx/>
-              <a:buFontTx/>
-              <a:buNone/>
-              <a:tabLst/>
-              <a:defRPr/>
-            </a:pPr>
-            <a:r>
-              <a:rPr lang="en-GB" noProof="0" dirty="0"/>
-              <a:t>[Insert legal entity - classification level]</a:t>
-            </a:r>
-          </a:p>
-        </p:txBody>
-      </p:sp>
-      <p:sp>
-        <p:nvSpPr>
           <p:cNvPr id="10" name="CityDate"/>
           <p:cNvSpPr>
             <a:spLocks noGrp="1"/>
@@ -1359,62 +1176,6 @@
           </a:p>
         </p:txBody>
       </p:sp>
-      <p:sp>
-        <p:nvSpPr>
-          <p:cNvPr id="3" name="CompositeLogo"/>
-          <p:cNvSpPr>
-            <a:spLocks noGrp="1" noChangeAspect="1"/>
-          </p:cNvSpPr>
-          <p:nvPr>
-            <p:ph type="body" sz="quarter" idx="16" hasCustomPrompt="1"/>
-          </p:nvPr>
-        </p:nvSpPr>
-        <p:spPr bwMode="gray">
-          <a:xfrm>
-            <a:off x="6487200" y="432000"/>
-            <a:ext cx="2235600" cy="1164827"/>
-          </a:xfrm>
-          <a:blipFill>
-            <a:blip r:embed="rId2"/>
-            <a:stretch>
-              <a:fillRect/>
-            </a:stretch>
-          </a:blipFill>
-        </p:spPr>
-        <p:txBody>
-          <a:bodyPr>
-            <a:normAutofit/>
-          </a:bodyPr>
-          <a:lstStyle>
-            <a:lvl1pPr marL="0" indent="0">
-              <a:buNone/>
-              <a:defRPr sz="100">
-                <a:noFill/>
-                <a:latin typeface="UniCredit" panose="02000506040000020004" pitchFamily="2" charset="0"/>
-              </a:defRPr>
-            </a:lvl1pPr>
-            <a:lvl2pPr>
-              <a:defRPr sz="100"/>
-            </a:lvl2pPr>
-            <a:lvl3pPr>
-              <a:defRPr sz="100"/>
-            </a:lvl3pPr>
-            <a:lvl4pPr>
-              <a:defRPr sz="100"/>
-            </a:lvl4pPr>
-            <a:lvl5pPr>
-              <a:defRPr sz="100"/>
-            </a:lvl5pPr>
-          </a:lstStyle>
-          <a:p>
-            <a:pPr lvl="0"/>
-            <a:r>
-              <a:rPr lang="en-GB" noProof="1"/>
-              <a:t>fffdsfs</a:t>
-            </a:r>
-          </a:p>
-        </p:txBody>
-      </p:sp>
       <p:pic>
         <p:nvPicPr>
           <p:cNvPr id="2" name="Logo"/>
@@ -1424,7 +1185,7 @@
           <p:nvPr userDrawn="1"/>
         </p:nvPicPr>
         <p:blipFill>
-          <a:blip r:embed="rId3" cstate="print">
+          <a:blip r:embed="rId2" cstate="print">
             <a:extLst>
               <a:ext uri="{28A0092B-C50C-407E-A947-70E740481C1C}">
                 <a14:useLocalDpi xmlns:a14="http://schemas.microsoft.com/office/drawing/2010/main" val="0"/>
@@ -1512,96 +1273,6 @@
               <a:t>Click icon to add picture</a:t>
             </a:r>
             <a:endParaRPr lang="en-GB" noProof="1"/>
-          </a:p>
-        </p:txBody>
-      </p:sp>
-      <p:sp>
-        <p:nvSpPr>
-          <p:cNvPr id="7" name="LegalEntity"/>
-          <p:cNvSpPr>
-            <a:spLocks noGrp="1"/>
-          </p:cNvSpPr>
-          <p:nvPr>
-            <p:ph type="body" sz="quarter" idx="12" hasCustomPrompt="1"/>
-          </p:nvPr>
-        </p:nvSpPr>
-        <p:spPr>
-          <a:xfrm>
-            <a:off x="3312000" y="6705380"/>
-            <a:ext cx="2520000" cy="144000"/>
-          </a:xfrm>
-        </p:spPr>
-        <p:txBody>
-          <a:bodyPr>
-            <a:noAutofit/>
-          </a:bodyPr>
-          <a:lstStyle>
-            <a:lvl1pPr marL="0" marR="0" indent="0" algn="ctr" defTabSz="342875" rtl="0" eaLnBrk="1" fontAlgn="auto" latinLnBrk="0" hangingPunct="1">
-              <a:lnSpc>
-                <a:spcPct val="100000"/>
-              </a:lnSpc>
-              <a:spcBef>
-                <a:spcPct val="20000"/>
-              </a:spcBef>
-              <a:spcAft>
-                <a:spcPts val="0"/>
-              </a:spcAft>
-              <a:buClr>
-                <a:srgbClr val="E1061C"/>
-              </a:buClr>
-              <a:buSzTx/>
-              <a:buFontTx/>
-              <a:buNone/>
-              <a:tabLst/>
-              <a:defRPr sz="1000">
-                <a:latin typeface="+mn-lt"/>
-              </a:defRPr>
-            </a:lvl1pPr>
-            <a:lvl2pPr marL="457200" indent="0" algn="ctr">
-              <a:buFontTx/>
-              <a:buNone/>
-              <a:defRPr sz="900"/>
-            </a:lvl2pPr>
-            <a:lvl3pPr marL="914400" indent="0" algn="ctr">
-              <a:buFontTx/>
-              <a:buNone/>
-              <a:defRPr sz="900"/>
-            </a:lvl3pPr>
-            <a:lvl4pPr marL="1371600" indent="0" algn="ctr">
-              <a:buFontTx/>
-              <a:buNone/>
-              <a:defRPr sz="900"/>
-            </a:lvl4pPr>
-            <a:lvl5pPr marL="1828800" indent="0" algn="ctr">
-              <a:buFontTx/>
-              <a:buNone/>
-              <a:defRPr sz="900"/>
-            </a:lvl5pPr>
-          </a:lstStyle>
-          <a:p>
-            <a:pPr marL="0" marR="0" lvl="0" indent="0" algn="ctr" defTabSz="342875" rtl="0" eaLnBrk="1" fontAlgn="auto" latinLnBrk="0" hangingPunct="1">
-              <a:lnSpc>
-                <a:spcPct val="100000"/>
-              </a:lnSpc>
-              <a:spcBef>
-                <a:spcPct val="20000"/>
-              </a:spcBef>
-              <a:spcAft>
-                <a:spcPts val="0"/>
-              </a:spcAft>
-              <a:buClr>
-                <a:srgbClr val="E1061C"/>
-              </a:buClr>
-              <a:buSzTx/>
-              <a:buFontTx/>
-              <a:buNone/>
-              <a:tabLst/>
-              <a:defRPr/>
-            </a:pPr>
-            <a:r>
-              <a:rPr lang="en-GB" noProof="0" dirty="0"/>
-              <a:t>[Insert legal entity - classification level]</a:t>
-            </a:r>
           </a:p>
         </p:txBody>
       </p:sp>
@@ -1887,96 +1558,6 @@
       </p:sp>
       <p:sp>
         <p:nvSpPr>
-          <p:cNvPr id="4" name="LegalEntity"/>
-          <p:cNvSpPr>
-            <a:spLocks noGrp="1"/>
-          </p:cNvSpPr>
-          <p:nvPr>
-            <p:ph type="body" sz="quarter" idx="14" hasCustomPrompt="1"/>
-          </p:nvPr>
-        </p:nvSpPr>
-        <p:spPr>
-          <a:xfrm>
-            <a:off x="3312000" y="6705380"/>
-            <a:ext cx="2520000" cy="144000"/>
-          </a:xfrm>
-        </p:spPr>
-        <p:txBody>
-          <a:bodyPr>
-            <a:noAutofit/>
-          </a:bodyPr>
-          <a:lstStyle>
-            <a:lvl1pPr marL="0" marR="0" indent="0" algn="ctr" defTabSz="342875" rtl="0" eaLnBrk="1" fontAlgn="auto" latinLnBrk="0" hangingPunct="1">
-              <a:lnSpc>
-                <a:spcPct val="100000"/>
-              </a:lnSpc>
-              <a:spcBef>
-                <a:spcPct val="20000"/>
-              </a:spcBef>
-              <a:spcAft>
-                <a:spcPts val="0"/>
-              </a:spcAft>
-              <a:buClr>
-                <a:srgbClr val="E1061C"/>
-              </a:buClr>
-              <a:buSzTx/>
-              <a:buFontTx/>
-              <a:buNone/>
-              <a:tabLst/>
-              <a:defRPr sz="1000">
-                <a:latin typeface="+mn-lt"/>
-              </a:defRPr>
-            </a:lvl1pPr>
-            <a:lvl2pPr marL="457200" indent="0" algn="ctr">
-              <a:buFontTx/>
-              <a:buNone/>
-              <a:defRPr sz="900"/>
-            </a:lvl2pPr>
-            <a:lvl3pPr marL="914400" indent="0" algn="ctr">
-              <a:buFontTx/>
-              <a:buNone/>
-              <a:defRPr sz="900"/>
-            </a:lvl3pPr>
-            <a:lvl4pPr marL="1371600" indent="0" algn="ctr">
-              <a:buFontTx/>
-              <a:buNone/>
-              <a:defRPr sz="900"/>
-            </a:lvl4pPr>
-            <a:lvl5pPr marL="1828800" indent="0" algn="ctr">
-              <a:buFontTx/>
-              <a:buNone/>
-              <a:defRPr sz="900"/>
-            </a:lvl5pPr>
-          </a:lstStyle>
-          <a:p>
-            <a:pPr marL="0" marR="0" lvl="0" indent="0" algn="ctr" defTabSz="342875" rtl="0" eaLnBrk="1" fontAlgn="auto" latinLnBrk="0" hangingPunct="1">
-              <a:lnSpc>
-                <a:spcPct val="100000"/>
-              </a:lnSpc>
-              <a:spcBef>
-                <a:spcPct val="20000"/>
-              </a:spcBef>
-              <a:spcAft>
-                <a:spcPts val="0"/>
-              </a:spcAft>
-              <a:buClr>
-                <a:srgbClr val="E1061C"/>
-              </a:buClr>
-              <a:buSzTx/>
-              <a:buFontTx/>
-              <a:buNone/>
-              <a:tabLst/>
-              <a:defRPr/>
-            </a:pPr>
-            <a:r>
-              <a:rPr lang="en-GB" noProof="0" dirty="0"/>
-              <a:t>[Insert legal entity - classification level]</a:t>
-            </a:r>
-          </a:p>
-        </p:txBody>
-      </p:sp>
-      <p:sp>
-        <p:nvSpPr>
           <p:cNvPr id="7" name="SlideNumber"/>
           <p:cNvSpPr>
             <a:spLocks noGrp="1"/>
@@ -2083,36 +1664,6 @@
           </a:p>
         </p:txBody>
       </p:sp>
-      <p:pic>
-        <p:nvPicPr>
-          <p:cNvPr id="10" name="Picture 9"/>
-          <p:cNvPicPr>
-            <a:picLocks noChangeAspect="1"/>
-          </p:cNvPicPr>
-          <p:nvPr userDrawn="1"/>
-        </p:nvPicPr>
-        <p:blipFill>
-          <a:blip r:embed="rId2" cstate="print">
-            <a:extLst>
-              <a:ext uri="{28A0092B-C50C-407E-A947-70E740481C1C}">
-                <a14:useLocalDpi xmlns:a14="http://schemas.microsoft.com/office/drawing/2010/main" val="0"/>
-              </a:ext>
-            </a:extLst>
-          </a:blip>
-          <a:stretch>
-            <a:fillRect/>
-          </a:stretch>
-        </p:blipFill>
-        <p:spPr>
-          <a:xfrm>
-            <a:off x="8575200" y="6300000"/>
-            <a:ext cx="414000" cy="414000"/>
-          </a:xfrm>
-          <a:prstGeom prst="rect">
-            <a:avLst/>
-          </a:prstGeom>
-        </p:spPr>
-      </p:pic>
     </p:spTree>
     <p:extLst>
       <p:ext uri="{BB962C8B-B14F-4D97-AF65-F5344CB8AC3E}">
@@ -2185,96 +1736,6 @@
       </p:sp>
       <p:sp>
         <p:nvSpPr>
-          <p:cNvPr id="4" name="LegalEntity"/>
-          <p:cNvSpPr>
-            <a:spLocks noGrp="1"/>
-          </p:cNvSpPr>
-          <p:nvPr>
-            <p:ph type="body" sz="quarter" idx="14" hasCustomPrompt="1"/>
-          </p:nvPr>
-        </p:nvSpPr>
-        <p:spPr>
-          <a:xfrm>
-            <a:off x="3312000" y="6705380"/>
-            <a:ext cx="2520000" cy="144000"/>
-          </a:xfrm>
-        </p:spPr>
-        <p:txBody>
-          <a:bodyPr>
-            <a:noAutofit/>
-          </a:bodyPr>
-          <a:lstStyle>
-            <a:lvl1pPr marL="0" marR="0" indent="0" algn="ctr" defTabSz="342875" rtl="0" eaLnBrk="1" fontAlgn="auto" latinLnBrk="0" hangingPunct="1">
-              <a:lnSpc>
-                <a:spcPct val="100000"/>
-              </a:lnSpc>
-              <a:spcBef>
-                <a:spcPct val="20000"/>
-              </a:spcBef>
-              <a:spcAft>
-                <a:spcPts val="0"/>
-              </a:spcAft>
-              <a:buClr>
-                <a:srgbClr val="E1061C"/>
-              </a:buClr>
-              <a:buSzTx/>
-              <a:buFontTx/>
-              <a:buNone/>
-              <a:tabLst/>
-              <a:defRPr sz="1000">
-                <a:latin typeface="+mn-lt"/>
-              </a:defRPr>
-            </a:lvl1pPr>
-            <a:lvl2pPr marL="457200" indent="0" algn="ctr">
-              <a:buFontTx/>
-              <a:buNone/>
-              <a:defRPr sz="900"/>
-            </a:lvl2pPr>
-            <a:lvl3pPr marL="914400" indent="0" algn="ctr">
-              <a:buFontTx/>
-              <a:buNone/>
-              <a:defRPr sz="900"/>
-            </a:lvl3pPr>
-            <a:lvl4pPr marL="1371600" indent="0" algn="ctr">
-              <a:buFontTx/>
-              <a:buNone/>
-              <a:defRPr sz="900"/>
-            </a:lvl4pPr>
-            <a:lvl5pPr marL="1828800" indent="0" algn="ctr">
-              <a:buFontTx/>
-              <a:buNone/>
-              <a:defRPr sz="900"/>
-            </a:lvl5pPr>
-          </a:lstStyle>
-          <a:p>
-            <a:pPr marL="0" marR="0" lvl="0" indent="0" algn="ctr" defTabSz="342875" rtl="0" eaLnBrk="1" fontAlgn="auto" latinLnBrk="0" hangingPunct="1">
-              <a:lnSpc>
-                <a:spcPct val="100000"/>
-              </a:lnSpc>
-              <a:spcBef>
-                <a:spcPct val="20000"/>
-              </a:spcBef>
-              <a:spcAft>
-                <a:spcPts val="0"/>
-              </a:spcAft>
-              <a:buClr>
-                <a:srgbClr val="E1061C"/>
-              </a:buClr>
-              <a:buSzTx/>
-              <a:buFontTx/>
-              <a:buNone/>
-              <a:tabLst/>
-              <a:defRPr/>
-            </a:pPr>
-            <a:r>
-              <a:rPr lang="en-GB" noProof="0" dirty="0"/>
-              <a:t>[Insert legal entity - classification level]</a:t>
-            </a:r>
-          </a:p>
-        </p:txBody>
-      </p:sp>
-      <p:sp>
-        <p:nvSpPr>
           <p:cNvPr id="8" name="SlideNumber"/>
           <p:cNvSpPr>
             <a:spLocks noGrp="1"/>
@@ -2341,36 +1802,6 @@
           </a:p>
         </p:txBody>
       </p:sp>
-      <p:pic>
-        <p:nvPicPr>
-          <p:cNvPr id="9" name="Picture 8"/>
-          <p:cNvPicPr>
-            <a:picLocks noChangeAspect="1"/>
-          </p:cNvPicPr>
-          <p:nvPr userDrawn="1"/>
-        </p:nvPicPr>
-        <p:blipFill>
-          <a:blip r:embed="rId2" cstate="print">
-            <a:extLst>
-              <a:ext uri="{28A0092B-C50C-407E-A947-70E740481C1C}">
-                <a14:useLocalDpi xmlns:a14="http://schemas.microsoft.com/office/drawing/2010/main" val="0"/>
-              </a:ext>
-            </a:extLst>
-          </a:blip>
-          <a:stretch>
-            <a:fillRect/>
-          </a:stretch>
-        </p:blipFill>
-        <p:spPr>
-          <a:xfrm>
-            <a:off x="8575200" y="6300000"/>
-            <a:ext cx="414000" cy="414000"/>
-          </a:xfrm>
-          <a:prstGeom prst="rect">
-            <a:avLst/>
-          </a:prstGeom>
-        </p:spPr>
-      </p:pic>
     </p:spTree>
     <p:extLst>
       <p:ext uri="{BB962C8B-B14F-4D97-AF65-F5344CB8AC3E}">
@@ -2507,96 +1938,6 @@
       </p:sp>
       <p:sp>
         <p:nvSpPr>
-          <p:cNvPr id="4" name="LegalEntity"/>
-          <p:cNvSpPr>
-            <a:spLocks noGrp="1"/>
-          </p:cNvSpPr>
-          <p:nvPr>
-            <p:ph type="body" sz="quarter" idx="14" hasCustomPrompt="1"/>
-          </p:nvPr>
-        </p:nvSpPr>
-        <p:spPr>
-          <a:xfrm>
-            <a:off x="3312000" y="6705380"/>
-            <a:ext cx="2519362" cy="144000"/>
-          </a:xfrm>
-        </p:spPr>
-        <p:txBody>
-          <a:bodyPr>
-            <a:noAutofit/>
-          </a:bodyPr>
-          <a:lstStyle>
-            <a:lvl1pPr marL="0" marR="0" indent="0" algn="ctr" defTabSz="342875" rtl="0" eaLnBrk="1" fontAlgn="auto" latinLnBrk="0" hangingPunct="1">
-              <a:lnSpc>
-                <a:spcPct val="100000"/>
-              </a:lnSpc>
-              <a:spcBef>
-                <a:spcPct val="20000"/>
-              </a:spcBef>
-              <a:spcAft>
-                <a:spcPts val="0"/>
-              </a:spcAft>
-              <a:buClr>
-                <a:srgbClr val="E1061C"/>
-              </a:buClr>
-              <a:buSzTx/>
-              <a:buFontTx/>
-              <a:buNone/>
-              <a:tabLst/>
-              <a:defRPr sz="1000">
-                <a:latin typeface="UniCredit" panose="02000506040000020004" pitchFamily="2" charset="0"/>
-              </a:defRPr>
-            </a:lvl1pPr>
-            <a:lvl2pPr marL="457200" indent="0" algn="ctr">
-              <a:buFontTx/>
-              <a:buNone/>
-              <a:defRPr sz="900"/>
-            </a:lvl2pPr>
-            <a:lvl3pPr marL="914400" indent="0" algn="ctr">
-              <a:buFontTx/>
-              <a:buNone/>
-              <a:defRPr sz="900"/>
-            </a:lvl3pPr>
-            <a:lvl4pPr marL="1371600" indent="0" algn="ctr">
-              <a:buFontTx/>
-              <a:buNone/>
-              <a:defRPr sz="900"/>
-            </a:lvl4pPr>
-            <a:lvl5pPr marL="1828800" indent="0" algn="ctr">
-              <a:buFontTx/>
-              <a:buNone/>
-              <a:defRPr sz="900"/>
-            </a:lvl5pPr>
-          </a:lstStyle>
-          <a:p>
-            <a:pPr marL="0" marR="0" lvl="0" indent="0" algn="ctr" defTabSz="342875" rtl="0" eaLnBrk="1" fontAlgn="auto" latinLnBrk="0" hangingPunct="1">
-              <a:lnSpc>
-                <a:spcPct val="100000"/>
-              </a:lnSpc>
-              <a:spcBef>
-                <a:spcPct val="20000"/>
-              </a:spcBef>
-              <a:spcAft>
-                <a:spcPts val="0"/>
-              </a:spcAft>
-              <a:buClr>
-                <a:srgbClr val="E1061C"/>
-              </a:buClr>
-              <a:buSzTx/>
-              <a:buFontTx/>
-              <a:buNone/>
-              <a:tabLst/>
-              <a:defRPr/>
-            </a:pPr>
-            <a:r>
-              <a:rPr lang="en-GB" noProof="0" dirty="0"/>
-              <a:t>[Insert legal entity - classification level]</a:t>
-            </a:r>
-          </a:p>
-        </p:txBody>
-      </p:sp>
-      <p:sp>
-        <p:nvSpPr>
           <p:cNvPr id="2" name="Title"/>
           <p:cNvSpPr>
             <a:spLocks noGrp="1"/>
@@ -2629,36 +1970,6 @@
           </a:p>
         </p:txBody>
       </p:sp>
-      <p:pic>
-        <p:nvPicPr>
-          <p:cNvPr id="9" name="Picture 8"/>
-          <p:cNvPicPr>
-            <a:picLocks noChangeAspect="1"/>
-          </p:cNvPicPr>
-          <p:nvPr userDrawn="1"/>
-        </p:nvPicPr>
-        <p:blipFill>
-          <a:blip r:embed="rId2" cstate="print">
-            <a:extLst>
-              <a:ext uri="{28A0092B-C50C-407E-A947-70E740481C1C}">
-                <a14:useLocalDpi xmlns:a14="http://schemas.microsoft.com/office/drawing/2010/main" val="0"/>
-              </a:ext>
-            </a:extLst>
-          </a:blip>
-          <a:stretch>
-            <a:fillRect/>
-          </a:stretch>
-        </p:blipFill>
-        <p:spPr>
-          <a:xfrm>
-            <a:off x="8575200" y="6300000"/>
-            <a:ext cx="414000" cy="414000"/>
-          </a:xfrm>
-          <a:prstGeom prst="rect">
-            <a:avLst/>
-          </a:prstGeom>
-        </p:spPr>
-      </p:pic>
     </p:spTree>
     <p:extLst>
       <p:ext uri="{BB962C8B-B14F-4D97-AF65-F5344CB8AC3E}">
@@ -2689,64 +2000,6 @@
           <a:chExt cx="0" cy="0"/>
         </a:xfrm>
       </p:grpSpPr>
-      <p:sp>
-        <p:nvSpPr>
-          <p:cNvPr id="7" name="LegalEntity"/>
-          <p:cNvSpPr>
-            <a:spLocks noGrp="1"/>
-          </p:cNvSpPr>
-          <p:nvPr>
-            <p:ph type="body" sz="quarter" idx="12" hasCustomPrompt="1"/>
-          </p:nvPr>
-        </p:nvSpPr>
-        <p:spPr>
-          <a:xfrm>
-            <a:off x="3312000" y="6705380"/>
-            <a:ext cx="2520000" cy="144000"/>
-          </a:xfrm>
-        </p:spPr>
-        <p:txBody>
-          <a:bodyPr>
-            <a:noAutofit/>
-          </a:bodyPr>
-          <a:lstStyle>
-            <a:lvl1pPr marL="0" indent="0" algn="ctr">
-              <a:buFontTx/>
-              <a:buNone/>
-              <a:defRPr sz="1000">
-                <a:latin typeface="+mn-lt"/>
-              </a:defRPr>
-            </a:lvl1pPr>
-            <a:lvl2pPr marL="457200" indent="0" algn="ctr">
-              <a:buFontTx/>
-              <a:buNone/>
-              <a:defRPr sz="900"/>
-            </a:lvl2pPr>
-            <a:lvl3pPr marL="914400" indent="0" algn="ctr">
-              <a:buFontTx/>
-              <a:buNone/>
-              <a:defRPr sz="900"/>
-            </a:lvl3pPr>
-            <a:lvl4pPr marL="1371600" indent="0" algn="ctr">
-              <a:buFontTx/>
-              <a:buNone/>
-              <a:defRPr sz="900"/>
-            </a:lvl4pPr>
-            <a:lvl5pPr marL="1828800" indent="0" algn="ctr">
-              <a:buFontTx/>
-              <a:buNone/>
-              <a:defRPr sz="900"/>
-            </a:lvl5pPr>
-          </a:lstStyle>
-          <a:p>
-            <a:pPr lvl="0"/>
-            <a:r>
-              <a:rPr lang="en-GB" noProof="0" dirty="0"/>
-              <a:t>[Insert legal entity - classification level]</a:t>
-            </a:r>
-          </a:p>
-        </p:txBody>
-      </p:sp>
       <p:sp>
         <p:nvSpPr>
           <p:cNvPr id="8" name="Baseline"/>
@@ -3095,96 +2348,6 @@
       </p:grpSpPr>
       <p:sp>
         <p:nvSpPr>
-          <p:cNvPr id="7" name="LegalEntity"/>
-          <p:cNvSpPr>
-            <a:spLocks noGrp="1"/>
-          </p:cNvSpPr>
-          <p:nvPr>
-            <p:ph type="body" sz="quarter" idx="12" hasCustomPrompt="1"/>
-          </p:nvPr>
-        </p:nvSpPr>
-        <p:spPr>
-          <a:xfrm>
-            <a:off x="3312000" y="6705380"/>
-            <a:ext cx="2520000" cy="144000"/>
-          </a:xfrm>
-        </p:spPr>
-        <p:txBody>
-          <a:bodyPr>
-            <a:noAutofit/>
-          </a:bodyPr>
-          <a:lstStyle>
-            <a:lvl1pPr marL="0" marR="0" indent="0" algn="ctr" defTabSz="342875" rtl="0" eaLnBrk="1" fontAlgn="auto" latinLnBrk="0" hangingPunct="1">
-              <a:lnSpc>
-                <a:spcPct val="100000"/>
-              </a:lnSpc>
-              <a:spcBef>
-                <a:spcPct val="20000"/>
-              </a:spcBef>
-              <a:spcAft>
-                <a:spcPts val="0"/>
-              </a:spcAft>
-              <a:buClr>
-                <a:srgbClr val="E1061C"/>
-              </a:buClr>
-              <a:buSzTx/>
-              <a:buFontTx/>
-              <a:buNone/>
-              <a:tabLst/>
-              <a:defRPr sz="1000">
-                <a:latin typeface="+mn-lt"/>
-              </a:defRPr>
-            </a:lvl1pPr>
-            <a:lvl2pPr marL="457200" indent="0" algn="ctr">
-              <a:buFontTx/>
-              <a:buNone/>
-              <a:defRPr sz="900"/>
-            </a:lvl2pPr>
-            <a:lvl3pPr marL="914400" indent="0" algn="ctr">
-              <a:buFontTx/>
-              <a:buNone/>
-              <a:defRPr sz="900"/>
-            </a:lvl3pPr>
-            <a:lvl4pPr marL="1371600" indent="0" algn="ctr">
-              <a:buFontTx/>
-              <a:buNone/>
-              <a:defRPr sz="900"/>
-            </a:lvl4pPr>
-            <a:lvl5pPr marL="1828800" indent="0" algn="ctr">
-              <a:buFontTx/>
-              <a:buNone/>
-              <a:defRPr sz="900"/>
-            </a:lvl5pPr>
-          </a:lstStyle>
-          <a:p>
-            <a:pPr marL="0" marR="0" lvl="0" indent="0" algn="ctr" defTabSz="342875" rtl="0" eaLnBrk="1" fontAlgn="auto" latinLnBrk="0" hangingPunct="1">
-              <a:lnSpc>
-                <a:spcPct val="100000"/>
-              </a:lnSpc>
-              <a:spcBef>
-                <a:spcPct val="20000"/>
-              </a:spcBef>
-              <a:spcAft>
-                <a:spcPts val="0"/>
-              </a:spcAft>
-              <a:buClr>
-                <a:srgbClr val="E1061C"/>
-              </a:buClr>
-              <a:buSzTx/>
-              <a:buFontTx/>
-              <a:buNone/>
-              <a:tabLst/>
-              <a:defRPr/>
-            </a:pPr>
-            <a:r>
-              <a:rPr lang="en-GB" noProof="0" dirty="0"/>
-              <a:t>[Insert legal entity - classification level]</a:t>
-            </a:r>
-          </a:p>
-        </p:txBody>
-      </p:sp>
-      <p:sp>
-        <p:nvSpPr>
           <p:cNvPr id="8" name="Footer"/>
           <p:cNvSpPr>
             <a:spLocks noGrp="1"/>
@@ -3486,96 +2649,6 @@
       </p:grpSpPr>
       <p:sp>
         <p:nvSpPr>
-          <p:cNvPr id="7" name="LegalEntity"/>
-          <p:cNvSpPr>
-            <a:spLocks noGrp="1"/>
-          </p:cNvSpPr>
-          <p:nvPr>
-            <p:ph type="body" sz="quarter" idx="12" hasCustomPrompt="1"/>
-          </p:nvPr>
-        </p:nvSpPr>
-        <p:spPr>
-          <a:xfrm>
-            <a:off x="3312000" y="6705380"/>
-            <a:ext cx="2520000" cy="144000"/>
-          </a:xfrm>
-        </p:spPr>
-        <p:txBody>
-          <a:bodyPr>
-            <a:noAutofit/>
-          </a:bodyPr>
-          <a:lstStyle>
-            <a:lvl1pPr marL="0" marR="0" indent="0" algn="ctr" defTabSz="342875" rtl="0" eaLnBrk="1" fontAlgn="auto" latinLnBrk="0" hangingPunct="1">
-              <a:lnSpc>
-                <a:spcPct val="100000"/>
-              </a:lnSpc>
-              <a:spcBef>
-                <a:spcPct val="20000"/>
-              </a:spcBef>
-              <a:spcAft>
-                <a:spcPts val="0"/>
-              </a:spcAft>
-              <a:buClr>
-                <a:srgbClr val="E1061C"/>
-              </a:buClr>
-              <a:buSzTx/>
-              <a:buFontTx/>
-              <a:buNone/>
-              <a:tabLst/>
-              <a:defRPr sz="1000">
-                <a:latin typeface="+mn-lt"/>
-              </a:defRPr>
-            </a:lvl1pPr>
-            <a:lvl2pPr marL="457200" indent="0" algn="ctr">
-              <a:buFontTx/>
-              <a:buNone/>
-              <a:defRPr sz="900"/>
-            </a:lvl2pPr>
-            <a:lvl3pPr marL="914400" indent="0" algn="ctr">
-              <a:buFontTx/>
-              <a:buNone/>
-              <a:defRPr sz="900"/>
-            </a:lvl3pPr>
-            <a:lvl4pPr marL="1371600" indent="0" algn="ctr">
-              <a:buFontTx/>
-              <a:buNone/>
-              <a:defRPr sz="900"/>
-            </a:lvl4pPr>
-            <a:lvl5pPr marL="1828800" indent="0" algn="ctr">
-              <a:buFontTx/>
-              <a:buNone/>
-              <a:defRPr sz="900"/>
-            </a:lvl5pPr>
-          </a:lstStyle>
-          <a:p>
-            <a:pPr marL="0" marR="0" lvl="0" indent="0" algn="ctr" defTabSz="342875" rtl="0" eaLnBrk="1" fontAlgn="auto" latinLnBrk="0" hangingPunct="1">
-              <a:lnSpc>
-                <a:spcPct val="100000"/>
-              </a:lnSpc>
-              <a:spcBef>
-                <a:spcPct val="20000"/>
-              </a:spcBef>
-              <a:spcAft>
-                <a:spcPts val="0"/>
-              </a:spcAft>
-              <a:buClr>
-                <a:srgbClr val="E1061C"/>
-              </a:buClr>
-              <a:buSzTx/>
-              <a:buFontTx/>
-              <a:buNone/>
-              <a:tabLst/>
-              <a:defRPr/>
-            </a:pPr>
-            <a:r>
-              <a:rPr lang="en-GB" noProof="0" dirty="0"/>
-              <a:t>[Insert legal entity - classification level]</a:t>
-            </a:r>
-          </a:p>
-        </p:txBody>
-      </p:sp>
-      <p:sp>
-        <p:nvSpPr>
           <p:cNvPr id="10" name="Baseline"/>
           <p:cNvSpPr>
             <a:spLocks noChangeShapeType="1"/>
@@ -4074,96 +3147,6 @@
       </p:grpSpPr>
       <p:sp>
         <p:nvSpPr>
-          <p:cNvPr id="7" name="LegalEntity"/>
-          <p:cNvSpPr>
-            <a:spLocks noGrp="1"/>
-          </p:cNvSpPr>
-          <p:nvPr>
-            <p:ph type="body" sz="quarter" idx="12" hasCustomPrompt="1"/>
-          </p:nvPr>
-        </p:nvSpPr>
-        <p:spPr>
-          <a:xfrm>
-            <a:off x="3312000" y="6705380"/>
-            <a:ext cx="2520000" cy="144000"/>
-          </a:xfrm>
-        </p:spPr>
-        <p:txBody>
-          <a:bodyPr>
-            <a:noAutofit/>
-          </a:bodyPr>
-          <a:lstStyle>
-            <a:lvl1pPr marL="0" marR="0" indent="0" algn="ctr" defTabSz="342875" rtl="0" eaLnBrk="1" fontAlgn="auto" latinLnBrk="0" hangingPunct="1">
-              <a:lnSpc>
-                <a:spcPct val="100000"/>
-              </a:lnSpc>
-              <a:spcBef>
-                <a:spcPct val="20000"/>
-              </a:spcBef>
-              <a:spcAft>
-                <a:spcPts val="0"/>
-              </a:spcAft>
-              <a:buClr>
-                <a:srgbClr val="E1061C"/>
-              </a:buClr>
-              <a:buSzTx/>
-              <a:buFontTx/>
-              <a:buNone/>
-              <a:tabLst/>
-              <a:defRPr sz="1000">
-                <a:latin typeface="+mn-lt"/>
-              </a:defRPr>
-            </a:lvl1pPr>
-            <a:lvl2pPr marL="457200" indent="0" algn="ctr">
-              <a:buFontTx/>
-              <a:buNone/>
-              <a:defRPr sz="900"/>
-            </a:lvl2pPr>
-            <a:lvl3pPr marL="914400" indent="0" algn="ctr">
-              <a:buFontTx/>
-              <a:buNone/>
-              <a:defRPr sz="900"/>
-            </a:lvl3pPr>
-            <a:lvl4pPr marL="1371600" indent="0" algn="ctr">
-              <a:buFontTx/>
-              <a:buNone/>
-              <a:defRPr sz="900"/>
-            </a:lvl4pPr>
-            <a:lvl5pPr marL="1828800" indent="0" algn="ctr">
-              <a:buFontTx/>
-              <a:buNone/>
-              <a:defRPr sz="900"/>
-            </a:lvl5pPr>
-          </a:lstStyle>
-          <a:p>
-            <a:pPr marL="0" marR="0" lvl="0" indent="0" algn="ctr" defTabSz="342875" rtl="0" eaLnBrk="1" fontAlgn="auto" latinLnBrk="0" hangingPunct="1">
-              <a:lnSpc>
-                <a:spcPct val="100000"/>
-              </a:lnSpc>
-              <a:spcBef>
-                <a:spcPct val="20000"/>
-              </a:spcBef>
-              <a:spcAft>
-                <a:spcPts val="0"/>
-              </a:spcAft>
-              <a:buClr>
-                <a:srgbClr val="E1061C"/>
-              </a:buClr>
-              <a:buSzTx/>
-              <a:buFontTx/>
-              <a:buNone/>
-              <a:tabLst/>
-              <a:defRPr/>
-            </a:pPr>
-            <a:r>
-              <a:rPr lang="en-GB" noProof="0" dirty="0"/>
-              <a:t>[Insert legal entity - classification level]</a:t>
-            </a:r>
-          </a:p>
-        </p:txBody>
-      </p:sp>
-      <p:sp>
-        <p:nvSpPr>
           <p:cNvPr id="8" name="Footer"/>
           <p:cNvSpPr>
             <a:spLocks noGrp="1"/>
@@ -4617,96 +3600,6 @@
       </p:grpSpPr>
       <p:sp>
         <p:nvSpPr>
-          <p:cNvPr id="7" name="LegalEntity"/>
-          <p:cNvSpPr>
-            <a:spLocks noGrp="1"/>
-          </p:cNvSpPr>
-          <p:nvPr>
-            <p:ph type="body" sz="quarter" idx="12" hasCustomPrompt="1"/>
-          </p:nvPr>
-        </p:nvSpPr>
-        <p:spPr>
-          <a:xfrm>
-            <a:off x="3312000" y="6705380"/>
-            <a:ext cx="2520000" cy="144000"/>
-          </a:xfrm>
-        </p:spPr>
-        <p:txBody>
-          <a:bodyPr>
-            <a:noAutofit/>
-          </a:bodyPr>
-          <a:lstStyle>
-            <a:lvl1pPr marL="0" marR="0" indent="0" algn="ctr" defTabSz="342875" rtl="0" eaLnBrk="1" fontAlgn="auto" latinLnBrk="0" hangingPunct="1">
-              <a:lnSpc>
-                <a:spcPct val="100000"/>
-              </a:lnSpc>
-              <a:spcBef>
-                <a:spcPct val="20000"/>
-              </a:spcBef>
-              <a:spcAft>
-                <a:spcPts val="0"/>
-              </a:spcAft>
-              <a:buClr>
-                <a:srgbClr val="E1061C"/>
-              </a:buClr>
-              <a:buSzTx/>
-              <a:buFontTx/>
-              <a:buNone/>
-              <a:tabLst/>
-              <a:defRPr sz="1000">
-                <a:latin typeface="+mn-lt"/>
-              </a:defRPr>
-            </a:lvl1pPr>
-            <a:lvl2pPr marL="457200" indent="0" algn="ctr">
-              <a:buFontTx/>
-              <a:buNone/>
-              <a:defRPr sz="900"/>
-            </a:lvl2pPr>
-            <a:lvl3pPr marL="914400" indent="0" algn="ctr">
-              <a:buFontTx/>
-              <a:buNone/>
-              <a:defRPr sz="900"/>
-            </a:lvl3pPr>
-            <a:lvl4pPr marL="1371600" indent="0" algn="ctr">
-              <a:buFontTx/>
-              <a:buNone/>
-              <a:defRPr sz="900"/>
-            </a:lvl4pPr>
-            <a:lvl5pPr marL="1828800" indent="0" algn="ctr">
-              <a:buFontTx/>
-              <a:buNone/>
-              <a:defRPr sz="900"/>
-            </a:lvl5pPr>
-          </a:lstStyle>
-          <a:p>
-            <a:pPr marL="0" marR="0" lvl="0" indent="0" algn="ctr" defTabSz="342875" rtl="0" eaLnBrk="1" fontAlgn="auto" latinLnBrk="0" hangingPunct="1">
-              <a:lnSpc>
-                <a:spcPct val="100000"/>
-              </a:lnSpc>
-              <a:spcBef>
-                <a:spcPct val="20000"/>
-              </a:spcBef>
-              <a:spcAft>
-                <a:spcPts val="0"/>
-              </a:spcAft>
-              <a:buClr>
-                <a:srgbClr val="E1061C"/>
-              </a:buClr>
-              <a:buSzTx/>
-              <a:buFontTx/>
-              <a:buNone/>
-              <a:tabLst/>
-              <a:defRPr/>
-            </a:pPr>
-            <a:r>
-              <a:rPr lang="en-GB" noProof="0" dirty="0"/>
-              <a:t>[Insert legal entity - classification level]</a:t>
-            </a:r>
-          </a:p>
-        </p:txBody>
-      </p:sp>
-      <p:sp>
-        <p:nvSpPr>
           <p:cNvPr id="8" name="Footer"/>
           <p:cNvSpPr>
             <a:spLocks noGrp="1"/>
@@ -5016,65 +3909,6 @@
       </p:sp>
       <p:sp>
         <p:nvSpPr>
-          <p:cNvPr id="4" name="LegalEntity"/>
-          <p:cNvSpPr>
-            <a:spLocks noGrp="1"/>
-          </p:cNvSpPr>
-          <p:nvPr>
-            <p:ph type="body" sz="quarter" idx="13" hasCustomPrompt="1"/>
-          </p:nvPr>
-        </p:nvSpPr>
-        <p:spPr>
-          <a:xfrm>
-            <a:off x="5842800" y="4546800"/>
-            <a:ext cx="2880000" cy="208800"/>
-          </a:xfrm>
-          <a:prstGeom prst="rect">
-            <a:avLst/>
-          </a:prstGeom>
-        </p:spPr>
-        <p:txBody>
-          <a:bodyPr lIns="0" tIns="0" rIns="0" bIns="0">
-            <a:noAutofit/>
-          </a:bodyPr>
-          <a:lstStyle>
-            <a:lvl1pPr marL="0" indent="0" algn="r">
-              <a:buFontTx/>
-              <a:buNone/>
-              <a:defRPr sz="1200"/>
-            </a:lvl1pPr>
-            <a:lvl2pPr marL="475200" indent="0" algn="r">
-              <a:buFontTx/>
-              <a:buNone/>
-              <a:defRPr sz="1200"/>
-            </a:lvl2pPr>
-            <a:lvl3pPr algn="r">
-              <a:buFontTx/>
-              <a:buNone/>
-              <a:defRPr sz="1200"/>
-            </a:lvl3pPr>
-            <a:lvl4pPr marL="1425600" indent="0" algn="r">
-              <a:buFontTx/>
-              <a:buNone/>
-              <a:defRPr sz="1200"/>
-            </a:lvl4pPr>
-            <a:lvl5pPr marL="2001600" indent="0" algn="r">
-              <a:buFontTx/>
-              <a:buNone/>
-              <a:defRPr sz="1200"/>
-            </a:lvl5pPr>
-          </a:lstStyle>
-          <a:p>
-            <a:pPr lvl="0"/>
-            <a:r>
-              <a:rPr lang="en-GB" noProof="0" dirty="0"/>
-              <a:t>[Insert legal entity - classification level]</a:t>
-            </a:r>
-          </a:p>
-        </p:txBody>
-      </p:sp>
-      <p:sp>
-        <p:nvSpPr>
           <p:cNvPr id="7" name="CityDate"/>
           <p:cNvSpPr>
             <a:spLocks noGrp="1"/>
@@ -5286,50 +4120,6 @@
           </a:p>
         </p:txBody>
       </p:sp>
-      <p:sp>
-        <p:nvSpPr>
-          <p:cNvPr id="6" name="CompositeLogo"/>
-          <p:cNvSpPr>
-            <a:spLocks noGrp="1" noChangeAspect="1"/>
-          </p:cNvSpPr>
-          <p:nvPr>
-            <p:ph type="body" sz="quarter" idx="16"/>
-          </p:nvPr>
-        </p:nvSpPr>
-        <p:spPr bwMode="gray">
-          <a:xfrm>
-            <a:off x="6487200" y="432000"/>
-            <a:ext cx="2235600" cy="1164827"/>
-          </a:xfrm>
-          <a:blipFill>
-            <a:blip r:embed="rId2"/>
-            <a:stretch>
-              <a:fillRect/>
-            </a:stretch>
-          </a:blipFill>
-        </p:spPr>
-        <p:txBody>
-          <a:bodyPr>
-            <a:normAutofit/>
-          </a:bodyPr>
-          <a:lstStyle>
-            <a:lvl1pPr marL="0" indent="0">
-              <a:buNone/>
-              <a:defRPr sz="100">
-                <a:noFill/>
-                <a:latin typeface="UniCredit" panose="02000506040000020004" pitchFamily="2" charset="0"/>
-              </a:defRPr>
-            </a:lvl1pPr>
-          </a:lstStyle>
-          <a:p>
-            <a:pPr lvl="0"/>
-            <a:r>
-              <a:rPr lang="en-US" noProof="1"/>
-              <a:t>Click to edit Master text styles</a:t>
-            </a:r>
-          </a:p>
-        </p:txBody>
-      </p:sp>
       <p:pic>
         <p:nvPicPr>
           <p:cNvPr id="2" name="Logo"/>
@@ -5339,7 +4129,7 @@
           <p:nvPr userDrawn="1"/>
         </p:nvPicPr>
         <p:blipFill>
-          <a:blip r:embed="rId3" cstate="print">
+          <a:blip r:embed="rId2" cstate="print">
             <a:extLst>
               <a:ext uri="{28A0092B-C50C-407E-A947-70E740481C1C}">
                 <a14:useLocalDpi xmlns:a14="http://schemas.microsoft.com/office/drawing/2010/main" val="0"/>
@@ -5497,99 +4287,6 @@
       </p:sp>
       <p:sp>
         <p:nvSpPr>
-          <p:cNvPr id="13" name="LegalEntity"/>
-          <p:cNvSpPr>
-            <a:spLocks noGrp="1"/>
-          </p:cNvSpPr>
-          <p:nvPr>
-            <p:ph type="body" sz="quarter" idx="14" hasCustomPrompt="1"/>
-          </p:nvPr>
-        </p:nvSpPr>
-        <p:spPr>
-          <a:xfrm>
-            <a:off x="5842800" y="4546800"/>
-            <a:ext cx="2880000" cy="208800"/>
-          </a:xfrm>
-          <a:prstGeom prst="rect">
-            <a:avLst/>
-          </a:prstGeom>
-        </p:spPr>
-        <p:txBody>
-          <a:bodyPr lIns="0" tIns="0" rIns="0" bIns="0">
-            <a:noAutofit/>
-          </a:bodyPr>
-          <a:lstStyle>
-            <a:lvl1pPr marL="0" marR="0" indent="0" algn="r" defTabSz="342875" rtl="0" eaLnBrk="1" fontAlgn="auto" latinLnBrk="0" hangingPunct="1">
-              <a:lnSpc>
-                <a:spcPct val="100000"/>
-              </a:lnSpc>
-              <a:spcBef>
-                <a:spcPct val="20000"/>
-              </a:spcBef>
-              <a:spcAft>
-                <a:spcPts val="0"/>
-              </a:spcAft>
-              <a:buClr>
-                <a:srgbClr val="E1061C"/>
-              </a:buClr>
-              <a:buSzTx/>
-              <a:buFontTx/>
-              <a:buNone/>
-              <a:tabLst/>
-              <a:defRPr sz="1200">
-                <a:latin typeface="+mn-lt"/>
-              </a:defRPr>
-            </a:lvl1pPr>
-            <a:lvl2pPr marL="475200" indent="0" algn="r">
-              <a:buFontTx/>
-              <a:buNone/>
-              <a:defRPr sz="1200"/>
-            </a:lvl2pPr>
-            <a:lvl3pPr algn="r">
-              <a:buFontTx/>
-              <a:buNone/>
-              <a:defRPr sz="1200"/>
-            </a:lvl3pPr>
-            <a:lvl4pPr marL="1425600" indent="0" algn="r">
-              <a:buFontTx/>
-              <a:buNone/>
-              <a:defRPr sz="1200"/>
-            </a:lvl4pPr>
-            <a:lvl5pPr marL="2001600" indent="0" algn="r">
-              <a:buFontTx/>
-              <a:buNone/>
-              <a:defRPr sz="1200"/>
-            </a:lvl5pPr>
-          </a:lstStyle>
-          <a:p>
-            <a:pPr marL="0" marR="0" lvl="0" indent="0" algn="r" defTabSz="342875" rtl="0" eaLnBrk="1" fontAlgn="auto" latinLnBrk="0" hangingPunct="1">
-              <a:lnSpc>
-                <a:spcPct val="100000"/>
-              </a:lnSpc>
-              <a:spcBef>
-                <a:spcPct val="20000"/>
-              </a:spcBef>
-              <a:spcAft>
-                <a:spcPts val="0"/>
-              </a:spcAft>
-              <a:buClr>
-                <a:srgbClr val="E1061C"/>
-              </a:buClr>
-              <a:buSzTx/>
-              <a:buFontTx/>
-              <a:buNone/>
-              <a:tabLst/>
-              <a:defRPr/>
-            </a:pPr>
-            <a:r>
-              <a:rPr lang="en-GB" noProof="0" dirty="0"/>
-              <a:t>[Insert legal entity - classification level]</a:t>
-            </a:r>
-          </a:p>
-        </p:txBody>
-      </p:sp>
-      <p:sp>
-        <p:nvSpPr>
           <p:cNvPr id="10" name="CityDate"/>
           <p:cNvSpPr>
             <a:spLocks noGrp="1"/>
@@ -5787,62 +4484,6 @@
           </a:p>
         </p:txBody>
       </p:sp>
-      <p:sp>
-        <p:nvSpPr>
-          <p:cNvPr id="3" name="CompositeLogo"/>
-          <p:cNvSpPr>
-            <a:spLocks noGrp="1"/>
-          </p:cNvSpPr>
-          <p:nvPr>
-            <p:ph type="body" sz="quarter" idx="16"/>
-          </p:nvPr>
-        </p:nvSpPr>
-        <p:spPr bwMode="gray">
-          <a:xfrm>
-            <a:off x="7754400" y="432000"/>
-            <a:ext cx="972000" cy="1072800"/>
-          </a:xfrm>
-          <a:blipFill>
-            <a:blip r:embed="rId2"/>
-            <a:stretch>
-              <a:fillRect/>
-            </a:stretch>
-          </a:blipFill>
-        </p:spPr>
-        <p:txBody>
-          <a:bodyPr>
-            <a:normAutofit/>
-          </a:bodyPr>
-          <a:lstStyle>
-            <a:lvl1pPr marL="0" indent="0">
-              <a:buNone/>
-              <a:defRPr sz="100">
-                <a:noFill/>
-                <a:latin typeface="UniCredit" panose="02000506040000020004" pitchFamily="2" charset="0"/>
-              </a:defRPr>
-            </a:lvl1pPr>
-            <a:lvl2pPr>
-              <a:defRPr sz="100"/>
-            </a:lvl2pPr>
-            <a:lvl3pPr>
-              <a:defRPr sz="100"/>
-            </a:lvl3pPr>
-            <a:lvl4pPr>
-              <a:defRPr sz="100"/>
-            </a:lvl4pPr>
-            <a:lvl5pPr>
-              <a:defRPr sz="100"/>
-            </a:lvl5pPr>
-          </a:lstStyle>
-          <a:p>
-            <a:pPr lvl="0"/>
-            <a:r>
-              <a:rPr lang="en-US" noProof="1"/>
-              <a:t>Click to edit Master text styles</a:t>
-            </a:r>
-          </a:p>
-        </p:txBody>
-      </p:sp>
       <p:pic>
         <p:nvPicPr>
           <p:cNvPr id="2" name="Logo"/>
@@ -5852,7 +4493,7 @@
           <p:nvPr userDrawn="1"/>
         </p:nvPicPr>
         <p:blipFill>
-          <a:blip r:embed="rId3" cstate="print">
+          <a:blip r:embed="rId2" cstate="print">
             <a:extLst>
               <a:ext uri="{28A0092B-C50C-407E-A947-70E740481C1C}">
                 <a14:useLocalDpi xmlns:a14="http://schemas.microsoft.com/office/drawing/2010/main" val="0"/>
@@ -6010,99 +4651,6 @@
       </p:sp>
       <p:sp>
         <p:nvSpPr>
-          <p:cNvPr id="13" name="LegalEntity"/>
-          <p:cNvSpPr>
-            <a:spLocks noGrp="1"/>
-          </p:cNvSpPr>
-          <p:nvPr>
-            <p:ph type="body" sz="quarter" idx="14" hasCustomPrompt="1"/>
-          </p:nvPr>
-        </p:nvSpPr>
-        <p:spPr>
-          <a:xfrm>
-            <a:off x="5842800" y="4546800"/>
-            <a:ext cx="2880000" cy="208800"/>
-          </a:xfrm>
-          <a:prstGeom prst="rect">
-            <a:avLst/>
-          </a:prstGeom>
-        </p:spPr>
-        <p:txBody>
-          <a:bodyPr lIns="0" tIns="0" rIns="0" bIns="0">
-            <a:noAutofit/>
-          </a:bodyPr>
-          <a:lstStyle>
-            <a:lvl1pPr marL="0" marR="0" indent="0" algn="r" defTabSz="342875" rtl="0" eaLnBrk="1" fontAlgn="auto" latinLnBrk="0" hangingPunct="1">
-              <a:lnSpc>
-                <a:spcPct val="100000"/>
-              </a:lnSpc>
-              <a:spcBef>
-                <a:spcPct val="20000"/>
-              </a:spcBef>
-              <a:spcAft>
-                <a:spcPts val="0"/>
-              </a:spcAft>
-              <a:buClr>
-                <a:srgbClr val="E1061C"/>
-              </a:buClr>
-              <a:buSzTx/>
-              <a:buFontTx/>
-              <a:buNone/>
-              <a:tabLst/>
-              <a:defRPr sz="1200">
-                <a:latin typeface="+mn-lt"/>
-              </a:defRPr>
-            </a:lvl1pPr>
-            <a:lvl2pPr marL="475200" indent="0" algn="r">
-              <a:buFontTx/>
-              <a:buNone/>
-              <a:defRPr sz="1200"/>
-            </a:lvl2pPr>
-            <a:lvl3pPr algn="r">
-              <a:buFontTx/>
-              <a:buNone/>
-              <a:defRPr sz="1200"/>
-            </a:lvl3pPr>
-            <a:lvl4pPr marL="1425600" indent="0" algn="r">
-              <a:buFontTx/>
-              <a:buNone/>
-              <a:defRPr sz="1200"/>
-            </a:lvl4pPr>
-            <a:lvl5pPr marL="2001600" indent="0" algn="r">
-              <a:buFontTx/>
-              <a:buNone/>
-              <a:defRPr sz="1200"/>
-            </a:lvl5pPr>
-          </a:lstStyle>
-          <a:p>
-            <a:pPr marL="0" marR="0" lvl="0" indent="0" algn="r" defTabSz="342875" rtl="0" eaLnBrk="1" fontAlgn="auto" latinLnBrk="0" hangingPunct="1">
-              <a:lnSpc>
-                <a:spcPct val="100000"/>
-              </a:lnSpc>
-              <a:spcBef>
-                <a:spcPct val="20000"/>
-              </a:spcBef>
-              <a:spcAft>
-                <a:spcPts val="0"/>
-              </a:spcAft>
-              <a:buClr>
-                <a:srgbClr val="E1061C"/>
-              </a:buClr>
-              <a:buSzTx/>
-              <a:buFontTx/>
-              <a:buNone/>
-              <a:tabLst/>
-              <a:defRPr/>
-            </a:pPr>
-            <a:r>
-              <a:rPr lang="en-GB" noProof="0" dirty="0"/>
-              <a:t>[Insert legal entity - classification level]</a:t>
-            </a:r>
-          </a:p>
-        </p:txBody>
-      </p:sp>
-      <p:sp>
-        <p:nvSpPr>
           <p:cNvPr id="10" name="CityDate"/>
           <p:cNvSpPr>
             <a:spLocks noGrp="1"/>
@@ -6300,62 +4848,6 @@
           </a:p>
         </p:txBody>
       </p:sp>
-      <p:sp>
-        <p:nvSpPr>
-          <p:cNvPr id="3" name="CompositeLogo"/>
-          <p:cNvSpPr>
-            <a:spLocks noGrp="1" noChangeAspect="1"/>
-          </p:cNvSpPr>
-          <p:nvPr>
-            <p:ph type="body" sz="quarter" idx="16"/>
-          </p:nvPr>
-        </p:nvSpPr>
-        <p:spPr bwMode="gray">
-          <a:xfrm>
-            <a:off x="6487200" y="432000"/>
-            <a:ext cx="2235600" cy="1164827"/>
-          </a:xfrm>
-          <a:blipFill>
-            <a:blip r:embed="rId2"/>
-            <a:stretch>
-              <a:fillRect/>
-            </a:stretch>
-          </a:blipFill>
-        </p:spPr>
-        <p:txBody>
-          <a:bodyPr>
-            <a:normAutofit/>
-          </a:bodyPr>
-          <a:lstStyle>
-            <a:lvl1pPr marL="0" indent="0">
-              <a:buNone/>
-              <a:defRPr sz="100">
-                <a:noFill/>
-                <a:latin typeface="UniCredit" panose="02000506040000020004" pitchFamily="2" charset="0"/>
-              </a:defRPr>
-            </a:lvl1pPr>
-            <a:lvl2pPr>
-              <a:defRPr sz="100"/>
-            </a:lvl2pPr>
-            <a:lvl3pPr>
-              <a:defRPr sz="100"/>
-            </a:lvl3pPr>
-            <a:lvl4pPr>
-              <a:defRPr sz="100"/>
-            </a:lvl4pPr>
-            <a:lvl5pPr>
-              <a:defRPr sz="100"/>
-            </a:lvl5pPr>
-          </a:lstStyle>
-          <a:p>
-            <a:pPr lvl="0"/>
-            <a:r>
-              <a:rPr lang="en-US" noProof="1"/>
-              <a:t>Click to edit Master text styles</a:t>
-            </a:r>
-          </a:p>
-        </p:txBody>
-      </p:sp>
       <p:pic>
         <p:nvPicPr>
           <p:cNvPr id="2" name="Logo"/>
@@ -6365,7 +4857,7 @@
           <p:nvPr userDrawn="1"/>
         </p:nvPicPr>
         <p:blipFill>
-          <a:blip r:embed="rId3" cstate="print">
+          <a:blip r:embed="rId2" cstate="print">
             <a:extLst>
               <a:ext uri="{28A0092B-C50C-407E-A947-70E740481C1C}">
                 <a14:useLocalDpi xmlns:a14="http://schemas.microsoft.com/office/drawing/2010/main" val="0"/>
@@ -6614,36 +5106,6 @@
           </a:p>
         </p:txBody>
       </p:sp>
-      <p:pic>
-        <p:nvPicPr>
-          <p:cNvPr id="9" name="Picture 8"/>
-          <p:cNvPicPr>
-            <a:picLocks noChangeAspect="1"/>
-          </p:cNvPicPr>
-          <p:nvPr/>
-        </p:nvPicPr>
-        <p:blipFill>
-          <a:blip r:embed="rId16" cstate="print">
-            <a:extLst>
-              <a:ext uri="{28A0092B-C50C-407E-A947-70E740481C1C}">
-                <a14:useLocalDpi xmlns:a14="http://schemas.microsoft.com/office/drawing/2010/main" val="0"/>
-              </a:ext>
-            </a:extLst>
-          </a:blip>
-          <a:stretch>
-            <a:fillRect/>
-          </a:stretch>
-        </p:blipFill>
-        <p:spPr>
-          <a:xfrm>
-            <a:off x="8575200" y="6300000"/>
-            <a:ext cx="414000" cy="414000"/>
-          </a:xfrm>
-          <a:prstGeom prst="rect">
-            <a:avLst/>
-          </a:prstGeom>
-        </p:spPr>
-      </p:pic>
     </p:spTree>
     <p:extLst>
       <p:ext uri="{BB962C8B-B14F-4D97-AF65-F5344CB8AC3E}">
@@ -7093,7 +5555,7 @@
   </p:txStyles>
   <p:extLst mod="1">
     <p:ext uri="{27BBF7A9-308A-43DC-89C8-2F10F3537804}">
-      <p15:sldGuideLst xmlns:p15="http://schemas.microsoft.com/office/powerpoint/2012/main" xmlns=""/>
+      <p15:sldGuideLst xmlns="" xmlns:p15="http://schemas.microsoft.com/office/powerpoint/2012/main"/>
     </p:ext>
   </p:extLst>
 </p:sldMaster>
@@ -7118,12 +5580,12 @@
       </p:grpSpPr>
       <p:sp>
         <p:nvSpPr>
-          <p:cNvPr id="2" name="Text Placeholder 1"/>
-          <p:cNvSpPr>
-            <a:spLocks noGrp="1"/>
-          </p:cNvSpPr>
-          <p:nvPr>
-            <p:ph type="body" sz="quarter" idx="13"/>
+          <p:cNvPr id="3" name="Text Placeholder 2"/>
+          <p:cNvSpPr>
+            <a:spLocks noGrp="1"/>
+          </p:cNvSpPr>
+          <p:nvPr>
+            <p:ph type="body" sz="quarter" idx="18"/>
           </p:nvPr>
         </p:nvSpPr>
         <p:spPr/>
@@ -7131,18 +5593,41 @@
           <a:bodyPr/>
           <a:lstStyle/>
           <a:p>
-            <a:endParaRPr lang="en-GB" dirty="0"/>
-          </a:p>
-        </p:txBody>
-      </p:sp>
-      <p:sp>
-        <p:nvSpPr>
-          <p:cNvPr id="3" name="Text Placeholder 2"/>
-          <p:cNvSpPr>
-            <a:spLocks noGrp="1"/>
-          </p:cNvSpPr>
-          <p:nvPr>
-            <p:ph type="body" sz="quarter" idx="18"/>
+            <a:r>
+              <a:rPr lang="en-GB" dirty="0">
+                <a:latin typeface="Calibri" panose="020F0502020204030204" pitchFamily="34" charset="0"/>
+              </a:rPr>
+              <a:t>Milan, </a:t>
+            </a:r>
+            <a:r>
+              <a:rPr lang="en-GB" dirty="0" smtClean="0">
+                <a:latin typeface="Calibri" panose="020F0502020204030204" pitchFamily="34" charset="0"/>
+              </a:rPr>
+              <a:t>April 19</a:t>
+            </a:r>
+            <a:r>
+              <a:rPr lang="en-GB" baseline="30000" dirty="0" smtClean="0">
+                <a:latin typeface="Calibri" panose="020F0502020204030204" pitchFamily="34" charset="0"/>
+              </a:rPr>
+              <a:t>th</a:t>
+            </a:r>
+            <a:r>
+              <a:rPr lang="en-GB" dirty="0">
+                <a:latin typeface="Calibri" panose="020F0502020204030204" pitchFamily="34" charset="0"/>
+              </a:rPr>
+              <a:t>, 2018</a:t>
+            </a:r>
+          </a:p>
+        </p:txBody>
+      </p:sp>
+      <p:sp>
+        <p:nvSpPr>
+          <p:cNvPr id="4" name="Text Placeholder 3"/>
+          <p:cNvSpPr>
+            <a:spLocks noGrp="1"/>
+          </p:cNvSpPr>
+          <p:nvPr>
+            <p:ph type="body" sz="quarter" idx="17"/>
           </p:nvPr>
         </p:nvSpPr>
         <p:spPr/>
@@ -7151,32 +5636,22 @@
           <a:lstStyle/>
           <a:p>
             <a:r>
-              <a:rPr lang="en-GB" dirty="0"/>
-              <a:t>Milan, </a:t>
-            </a:r>
-            <a:r>
-              <a:rPr lang="en-GB" dirty="0" smtClean="0"/>
-              <a:t>April 19</a:t>
-            </a:r>
-            <a:r>
-              <a:rPr lang="en-GB" baseline="30000" dirty="0" smtClean="0"/>
-              <a:t>th</a:t>
-            </a:r>
-            <a:r>
-              <a:rPr lang="en-GB" dirty="0"/>
-              <a:t>, 2018</a:t>
-            </a:r>
-          </a:p>
-        </p:txBody>
-      </p:sp>
-      <p:sp>
-        <p:nvSpPr>
-          <p:cNvPr id="4" name="Text Placeholder 3"/>
-          <p:cNvSpPr>
-            <a:spLocks noGrp="1"/>
-          </p:cNvSpPr>
-          <p:nvPr>
-            <p:ph type="body" sz="quarter" idx="17"/>
+              <a:rPr lang="en-GB" dirty="0">
+                <a:latin typeface="Calibri" panose="020F0502020204030204" pitchFamily="34" charset="0"/>
+              </a:rPr>
+              <a:t>Gabriele Bonomi Boseggia, Fabio Colombo, Luca Mammi</a:t>
+            </a:r>
+          </a:p>
+        </p:txBody>
+      </p:sp>
+      <p:sp>
+        <p:nvSpPr>
+          <p:cNvPr id="6" name="Title 5"/>
+          <p:cNvSpPr>
+            <a:spLocks noGrp="1"/>
+          </p:cNvSpPr>
+          <p:nvPr>
+            <p:ph type="title"/>
           </p:nvPr>
         </p:nvSpPr>
         <p:spPr/>
@@ -7185,15 +5660,53 @@
           <a:lstStyle/>
           <a:p>
             <a:r>
-              <a:rPr lang="en-GB" dirty="0"/>
-              <a:t>Gabriele Bonomi Boseggia, Fabio Colombo, Luca Mammi</a:t>
-            </a:r>
-          </a:p>
-        </p:txBody>
-      </p:sp>
-      <p:sp>
-        <p:nvSpPr>
-          <p:cNvPr id="5" name="Text Placeholder 4"/>
+              <a:rPr lang="en-GB" dirty="0">
+                <a:latin typeface="Calibri" panose="020F0502020204030204" pitchFamily="34" charset="0"/>
+              </a:rPr>
+              <a:t>Machine Learning Models:</a:t>
+            </a:r>
+            <a:br>
+              <a:rPr lang="en-GB" dirty="0">
+                <a:latin typeface="Calibri" panose="020F0502020204030204" pitchFamily="34" charset="0"/>
+              </a:rPr>
+            </a:br>
+            <a:r>
+              <a:rPr lang="en-GB" dirty="0">
+                <a:latin typeface="Calibri" panose="020F0502020204030204" pitchFamily="34" charset="0"/>
+              </a:rPr>
+              <a:t/>
+            </a:r>
+            <a:br>
+              <a:rPr lang="en-GB" dirty="0">
+                <a:latin typeface="Calibri" panose="020F0502020204030204" pitchFamily="34" charset="0"/>
+              </a:rPr>
+            </a:br>
+            <a:r>
+              <a:rPr lang="en-GB" dirty="0">
+                <a:latin typeface="Calibri" panose="020F0502020204030204" pitchFamily="34" charset="0"/>
+              </a:rPr>
+              <a:t>a hands-on </a:t>
+            </a:r>
+            <a:r>
+              <a:rPr lang="en-GB" dirty="0" smtClean="0">
+                <a:latin typeface="Calibri" panose="020F0502020204030204" pitchFamily="34" charset="0"/>
+              </a:rPr>
+              <a:t>experience</a:t>
+            </a:r>
+            <a:br>
+              <a:rPr lang="en-GB" dirty="0" smtClean="0">
+                <a:latin typeface="Calibri" panose="020F0502020204030204" pitchFamily="34" charset="0"/>
+              </a:rPr>
+            </a:br>
+            <a:endParaRPr lang="en-GB" dirty="0">
+              <a:latin typeface="Calibri" panose="020F0502020204030204" pitchFamily="34" charset="0"/>
+            </a:endParaRPr>
+          </a:p>
+        </p:txBody>
+      </p:sp>
+      <p:sp>
+        <p:nvSpPr>
+          <p:cNvPr id="5" name="Text Placeholder 6"/>
           <p:cNvSpPr>
             <a:spLocks noGrp="1"/>
           </p:cNvSpPr>
@@ -7201,70 +5714,31 @@
             <p:ph type="body" sz="quarter" idx="12"/>
           </p:nvPr>
         </p:nvSpPr>
-        <p:spPr/>
+        <p:spPr>
+          <a:xfrm>
+            <a:off x="539749" y="3279600"/>
+            <a:ext cx="8179200" cy="828000"/>
+          </a:xfrm>
+        </p:spPr>
         <p:txBody>
           <a:bodyPr/>
           <a:lstStyle/>
           <a:p>
             <a:r>
-              <a:rPr lang="en-GB" dirty="0"/>
-              <a:t>UniCredit Quant Community</a:t>
-            </a:r>
-          </a:p>
-        </p:txBody>
-      </p:sp>
-      <p:sp>
-        <p:nvSpPr>
-          <p:cNvPr id="6" name="Title 5"/>
-          <p:cNvSpPr>
-            <a:spLocks noGrp="1"/>
-          </p:cNvSpPr>
-          <p:nvPr>
-            <p:ph type="title"/>
-          </p:nvPr>
-        </p:nvSpPr>
-        <p:spPr/>
-        <p:txBody>
-          <a:bodyPr/>
-          <a:lstStyle/>
-          <a:p>
-            <a:r>
-              <a:rPr lang="en-GB" dirty="0"/>
-              <a:t>Machine Learning Models:</a:t>
-            </a:r>
-            <a:br>
-              <a:rPr lang="en-GB" dirty="0"/>
-            </a:br>
-            <a:r>
-              <a:rPr lang="en-GB" dirty="0"/>
-              <a:t/>
-            </a:r>
-            <a:br>
-              <a:rPr lang="en-GB" dirty="0"/>
-            </a:br>
-            <a:r>
-              <a:rPr lang="en-GB" dirty="0"/>
-              <a:t>a hands-on </a:t>
-            </a:r>
-            <a:r>
-              <a:rPr lang="en-GB" dirty="0" smtClean="0"/>
-              <a:t>experience</a:t>
-            </a:r>
-            <a:br>
-              <a:rPr lang="en-GB" dirty="0" smtClean="0"/>
-            </a:br>
-            <a:r>
-              <a:rPr lang="en-GB" dirty="0"/>
-              <a:t/>
-            </a:r>
-            <a:br>
-              <a:rPr lang="en-GB" dirty="0"/>
-            </a:br>
-            <a:r>
-              <a:rPr lang="en-GB" dirty="0" smtClean="0"/>
-              <a:t>(this is just a teaser trailer!)</a:t>
-            </a:r>
-            <a:endParaRPr lang="en-GB" dirty="0"/>
+              <a:rPr lang="en-US" dirty="0" smtClean="0">
+                <a:latin typeface="Calibri" panose="020F0502020204030204" pitchFamily="34" charset="0"/>
+              </a:rPr>
+              <a:t>(</a:t>
+            </a:r>
+            <a:r>
+              <a:rPr lang="en-US" dirty="0">
+                <a:latin typeface="Calibri" panose="020F0502020204030204" pitchFamily="34" charset="0"/>
+              </a:rPr>
+              <a:t>this is just a teaser trailer!)</a:t>
+            </a:r>
+            <a:endParaRPr lang="en-GB" dirty="0">
+              <a:latin typeface="Calibri" panose="020F0502020204030204" pitchFamily="34" charset="0"/>
+            </a:endParaRPr>
           </a:p>
         </p:txBody>
       </p:sp>
@@ -7300,12 +5774,12 @@
       </p:grpSpPr>
       <p:sp>
         <p:nvSpPr>
-          <p:cNvPr id="2" name="Text Placeholder 1"/>
-          <p:cNvSpPr>
-            <a:spLocks noGrp="1"/>
-          </p:cNvSpPr>
-          <p:nvPr>
-            <p:ph type="body" sz="quarter" idx="12"/>
+          <p:cNvPr id="3" name="Text Placeholder 2"/>
+          <p:cNvSpPr>
+            <a:spLocks noGrp="1"/>
+          </p:cNvSpPr>
+          <p:nvPr>
+            <p:ph type="body" sz="quarter" idx="16"/>
           </p:nvPr>
         </p:nvSpPr>
         <p:spPr/>
@@ -7313,26 +5787,9 @@
           <a:bodyPr/>
           <a:lstStyle/>
           <a:p>
-            <a:endParaRPr lang="en-GB"/>
-          </a:p>
-        </p:txBody>
-      </p:sp>
-      <p:sp>
-        <p:nvSpPr>
-          <p:cNvPr id="3" name="Text Placeholder 2"/>
-          <p:cNvSpPr>
-            <a:spLocks noGrp="1"/>
-          </p:cNvSpPr>
-          <p:nvPr>
-            <p:ph type="body" sz="quarter" idx="16"/>
-          </p:nvPr>
-        </p:nvSpPr>
-        <p:spPr/>
-        <p:txBody>
-          <a:bodyPr/>
-          <a:lstStyle/>
-          <a:p>
-            <a:endParaRPr lang="en-GB"/>
+            <a:endParaRPr lang="en-GB">
+              <a:latin typeface="Calibri" panose="020F0502020204030204" pitchFamily="34" charset="0"/>
+            </a:endParaRPr>
           </a:p>
         </p:txBody>
       </p:sp>
@@ -7355,13 +5812,17 @@
               <a:defRPr/>
             </a:pPr>
             <a:fld id="{1D1043DC-2681-49D5-9D69-158B3FA3398E}" type="slidenum">
-              <a:rPr lang="en-GB" noProof="1" smtClean="0"/>
+              <a:rPr lang="en-GB" noProof="1" smtClean="0">
+                <a:latin typeface="Calibri" panose="020F0502020204030204" pitchFamily="34" charset="0"/>
+              </a:rPr>
               <a:pPr>
                 <a:defRPr/>
               </a:pPr>
               <a:t>2</a:t>
             </a:fld>
-            <a:endParaRPr lang="en-GB" noProof="1"/>
+            <a:endParaRPr lang="en-GB" noProof="1">
+              <a:latin typeface="Calibri" panose="020F0502020204030204" pitchFamily="34" charset="0"/>
+            </a:endParaRPr>
           </a:p>
         </p:txBody>
       </p:sp>
@@ -7381,10 +5842,20 @@
           <a:lstStyle/>
           <a:p>
             <a:r>
-              <a:rPr lang="en-GB" dirty="0" smtClean="0"/>
-              <a:t>Follow one the links! (they're equivalent)</a:t>
-            </a:r>
-            <a:endParaRPr lang="en-GB" dirty="0"/>
+              <a:rPr lang="en-GB" dirty="0" smtClean="0">
+                <a:latin typeface="Calibri" panose="020F0502020204030204" pitchFamily="34" charset="0"/>
+              </a:rPr>
+              <a:t>Follow </a:t>
+            </a:r>
+            <a:r>
+              <a:rPr lang="en-GB" dirty="0" smtClean="0">
+                <a:latin typeface="Calibri" panose="020F0502020204030204" pitchFamily="34" charset="0"/>
+              </a:rPr>
+              <a:t>the link!</a:t>
+            </a:r>
+            <a:endParaRPr lang="en-GB" dirty="0">
+              <a:latin typeface="Calibri" panose="020F0502020204030204" pitchFamily="34" charset="0"/>
+            </a:endParaRPr>
           </a:p>
         </p:txBody>
       </p:sp>
@@ -7400,49 +5871,57 @@
         </p:nvSpPr>
         <p:spPr/>
         <p:txBody>
-          <a:bodyPr/>
+          <a:bodyPr>
+            <a:noAutofit/>
+          </a:bodyPr>
           <a:lstStyle/>
           <a:p>
             <a:pPr marL="0" indent="0" algn="ctr">
               <a:buNone/>
             </a:pPr>
-            <a:r>
-              <a:rPr lang="en-US" sz="9600" dirty="0">
+            <a:endParaRPr lang="en-US" sz="3100" dirty="0" smtClean="0">
+              <a:hlinkClick r:id="rId2"/>
+            </a:endParaRPr>
+          </a:p>
+          <a:p>
+            <a:pPr marL="0" indent="0" algn="ctr">
+              <a:buNone/>
+            </a:pPr>
+            <a:endParaRPr lang="en-US" sz="3100" dirty="0">
+              <a:hlinkClick r:id="rId2"/>
+            </a:endParaRPr>
+          </a:p>
+          <a:p>
+            <a:pPr marL="0" indent="0" algn="ctr">
+              <a:buNone/>
+            </a:pPr>
+            <a:endParaRPr lang="en-US" sz="3100" dirty="0" smtClean="0">
+              <a:hlinkClick r:id="rId2"/>
+            </a:endParaRPr>
+          </a:p>
+          <a:p>
+            <a:pPr marL="0" indent="0" algn="ctr">
+              <a:buNone/>
+            </a:pPr>
+            <a:r>
+              <a:rPr lang="en-US" sz="3100" dirty="0" smtClean="0">
                 <a:hlinkClick r:id="rId2"/>
               </a:rPr>
-              <a:t>goo.gl/GNaZ4o</a:t>
-            </a:r>
-            <a:endParaRPr lang="en-US" sz="9600" dirty="0"/>
-          </a:p>
-          <a:p>
-            <a:pPr marL="0" indent="0" algn="ctr" defTabSz="685749">
-              <a:spcBef>
-                <a:spcPts val="0"/>
-              </a:spcBef>
-              <a:buClrTx/>
-              <a:buNone/>
-              <a:defRPr/>
-            </a:pPr>
-            <a:endParaRPr lang="en-US" sz="9600" dirty="0" smtClean="0">
-              <a:hlinkClick r:id="rId3"/>
-            </a:endParaRPr>
-          </a:p>
-          <a:p>
-            <a:pPr marL="0" indent="0" algn="ctr" defTabSz="685749">
-              <a:spcBef>
-                <a:spcPts val="0"/>
-              </a:spcBef>
-              <a:buClrTx/>
-              <a:buNone/>
-              <a:defRPr/>
-            </a:pPr>
-            <a:r>
-              <a:rPr lang="en-US" sz="9600" dirty="0" smtClean="0">
-                <a:hlinkClick r:id="rId4"/>
+              <a:t>http</a:t>
+            </a:r>
+            <a:r>
+              <a:rPr lang="en-US" sz="3100" dirty="0">
+                <a:hlinkClick r:id="rId2"/>
               </a:rPr>
-              <a:t>goo.gl/K5SuC1</a:t>
-            </a:r>
-            <a:endParaRPr lang="en-GB" dirty="0"/>
+              <a:t>://</a:t>
+            </a:r>
+            <a:r>
+              <a:rPr lang="en-US" sz="3100" dirty="0">
+                <a:hlinkClick r:id="rId2"/>
+              </a:rPr>
+              <a:t>beta.mybinder.org/v2/gh/gbonomib/mlTeachings/master?filepath=0_teaser.ipynb?urlpath=tree</a:t>
+            </a:r>
+            <a:endParaRPr lang="en-GB" sz="3100" dirty="0"/>
           </a:p>
         </p:txBody>
       </p:sp>
@@ -7478,12 +5957,12 @@
       </p:grpSpPr>
       <p:sp>
         <p:nvSpPr>
-          <p:cNvPr id="2" name="Text Placeholder 1"/>
-          <p:cNvSpPr>
-            <a:spLocks noGrp="1"/>
-          </p:cNvSpPr>
-          <p:nvPr>
-            <p:ph type="body" sz="quarter" idx="12"/>
+          <p:cNvPr id="3" name="Text Placeholder 2"/>
+          <p:cNvSpPr>
+            <a:spLocks noGrp="1"/>
+          </p:cNvSpPr>
+          <p:nvPr>
+            <p:ph type="body" sz="quarter" idx="16"/>
           </p:nvPr>
         </p:nvSpPr>
         <p:spPr/>
@@ -7491,26 +5970,9 @@
           <a:bodyPr/>
           <a:lstStyle/>
           <a:p>
-            <a:endParaRPr lang="en-GB"/>
-          </a:p>
-        </p:txBody>
-      </p:sp>
-      <p:sp>
-        <p:nvSpPr>
-          <p:cNvPr id="3" name="Text Placeholder 2"/>
-          <p:cNvSpPr>
-            <a:spLocks noGrp="1"/>
-          </p:cNvSpPr>
-          <p:nvPr>
-            <p:ph type="body" sz="quarter" idx="16"/>
-          </p:nvPr>
-        </p:nvSpPr>
-        <p:spPr/>
-        <p:txBody>
-          <a:bodyPr/>
-          <a:lstStyle/>
-          <a:p>
-            <a:endParaRPr lang="en-GB"/>
+            <a:endParaRPr lang="en-GB">
+              <a:latin typeface="Calibri" panose="020F0502020204030204" pitchFamily="34" charset="0"/>
+            </a:endParaRPr>
           </a:p>
         </p:txBody>
       </p:sp>
@@ -7533,13 +5995,17 @@
               <a:defRPr/>
             </a:pPr>
             <a:fld id="{1D1043DC-2681-49D5-9D69-158B3FA3398E}" type="slidenum">
-              <a:rPr lang="en-GB" noProof="1" smtClean="0"/>
+              <a:rPr lang="en-GB" noProof="1" smtClean="0">
+                <a:latin typeface="Calibri" panose="020F0502020204030204" pitchFamily="34" charset="0"/>
+              </a:rPr>
               <a:pPr>
                 <a:defRPr/>
               </a:pPr>
               <a:t>3</a:t>
             </a:fld>
-            <a:endParaRPr lang="en-GB" noProof="1"/>
+            <a:endParaRPr lang="en-GB" noProof="1">
+              <a:latin typeface="Calibri" panose="020F0502020204030204" pitchFamily="34" charset="0"/>
+            </a:endParaRPr>
           </a:p>
         </p:txBody>
       </p:sp>
@@ -7559,22 +6025,30 @@
           <a:lstStyle/>
           <a:p>
             <a:r>
-              <a:rPr lang="en-GB" dirty="0" smtClean="0"/>
-              <a:t>If you only have your phone, take a pic of one of the two</a:t>
-            </a:r>
-            <a:endParaRPr lang="en-GB" dirty="0"/>
+              <a:rPr lang="en-GB" dirty="0" smtClean="0">
+                <a:latin typeface="Calibri" panose="020F0502020204030204" pitchFamily="34" charset="0"/>
+              </a:rPr>
+              <a:t>If you only have your phone, take a pic of </a:t>
+            </a:r>
+            <a:r>
+              <a:rPr lang="en-GB" dirty="0" smtClean="0">
+                <a:latin typeface="Calibri" panose="020F0502020204030204" pitchFamily="34" charset="0"/>
+              </a:rPr>
+              <a:t>the QR code</a:t>
+            </a:r>
+            <a:endParaRPr lang="en-GB" dirty="0">
+              <a:latin typeface="Calibri" panose="020F0502020204030204" pitchFamily="34" charset="0"/>
+            </a:endParaRPr>
           </a:p>
         </p:txBody>
       </p:sp>
       <p:pic>
         <p:nvPicPr>
-          <p:cNvPr id="2050" name="Picture 2"/>
+          <p:cNvPr id="5" name="Picture 2" descr="C:\Users\C305392\Desktop\frame.png"/>
           <p:cNvPicPr>
-            <a:picLocks noGrp="1" noChangeAspect="1" noChangeArrowheads="1"/>
+            <a:picLocks noChangeAspect="1" noChangeArrowheads="1"/>
           </p:cNvPicPr>
-          <p:nvPr>
-            <p:ph sz="quarter" idx="15"/>
-          </p:nvPr>
+          <p:nvPr/>
         </p:nvPicPr>
         <p:blipFill>
           <a:blip r:embed="rId2">
@@ -7591,62 +6065,8 @@
         </p:blipFill>
         <p:spPr bwMode="auto">
           <a:xfrm>
-            <a:off x="648000" y="1741138"/>
-            <a:ext cx="3600000" cy="3600000"/>
-          </a:xfrm>
-          <a:prstGeom prst="rect">
-            <a:avLst/>
-          </a:prstGeom>
-          <a:noFill/>
-          <a:ln>
-            <a:noFill/>
-          </a:ln>
-          <a:extLst>
-            <a:ext uri="{909E8E84-426E-40DD-AFC4-6F175D3DCCD1}">
-              <a14:hiddenFill xmlns:a14="http://schemas.microsoft.com/office/drawing/2010/main">
-                <a:solidFill>
-                  <a:schemeClr val="accent1"/>
-                </a:solidFill>
-              </a14:hiddenFill>
-            </a:ext>
-            <a:ext uri="{91240B29-F687-4F45-9708-019B960494DF}">
-              <a14:hiddenLine xmlns:a14="http://schemas.microsoft.com/office/drawing/2010/main" w="9525">
-                <a:solidFill>
-                  <a:schemeClr val="tx1"/>
-                </a:solidFill>
-                <a:miter lim="800000"/>
-                <a:headEnd/>
-                <a:tailEnd/>
-              </a14:hiddenLine>
-            </a:ext>
-          </a:extLst>
-        </p:spPr>
-      </p:pic>
-      <p:pic>
-        <p:nvPicPr>
-          <p:cNvPr id="2052" name="Picture 4" descr="https://goo.gl/K5SuC1.qr"/>
-          <p:cNvPicPr>
-            <a:picLocks noChangeAspect="1" noChangeArrowheads="1"/>
-          </p:cNvPicPr>
-          <p:nvPr/>
-        </p:nvPicPr>
-        <p:blipFill>
-          <a:blip r:embed="rId3">
-            <a:extLst>
-              <a:ext uri="{28A0092B-C50C-407E-A947-70E740481C1C}">
-                <a14:useLocalDpi xmlns:a14="http://schemas.microsoft.com/office/drawing/2010/main" val="0"/>
-              </a:ext>
-            </a:extLst>
-          </a:blip>
-          <a:srcRect/>
-          <a:stretch>
-            <a:fillRect/>
-          </a:stretch>
-        </p:blipFill>
-        <p:spPr bwMode="auto">
-          <a:xfrm>
-            <a:off x="4896000" y="1741138"/>
-            <a:ext cx="3600000" cy="3600000"/>
+            <a:off x="3143250" y="2000250"/>
+            <a:ext cx="2857500" cy="2857500"/>
           </a:xfrm>
           <a:prstGeom prst="rect">
             <a:avLst/>
@@ -7695,12 +6115,12 @@
       </p:grpSpPr>
       <p:sp>
         <p:nvSpPr>
-          <p:cNvPr id="2" name="Text Placeholder 1"/>
-          <p:cNvSpPr>
-            <a:spLocks noGrp="1"/>
-          </p:cNvSpPr>
-          <p:nvPr>
-            <p:ph type="body" sz="quarter" idx="12"/>
+          <p:cNvPr id="3" name="Text Placeholder 2"/>
+          <p:cNvSpPr>
+            <a:spLocks noGrp="1"/>
+          </p:cNvSpPr>
+          <p:nvPr>
+            <p:ph type="body" sz="quarter" idx="16"/>
           </p:nvPr>
         </p:nvSpPr>
         <p:spPr/>
@@ -7708,26 +6128,9 @@
           <a:bodyPr/>
           <a:lstStyle/>
           <a:p>
-            <a:endParaRPr lang="en-GB"/>
-          </a:p>
-        </p:txBody>
-      </p:sp>
-      <p:sp>
-        <p:nvSpPr>
-          <p:cNvPr id="3" name="Text Placeholder 2"/>
-          <p:cNvSpPr>
-            <a:spLocks noGrp="1"/>
-          </p:cNvSpPr>
-          <p:nvPr>
-            <p:ph type="body" sz="quarter" idx="16"/>
-          </p:nvPr>
-        </p:nvSpPr>
-        <p:spPr/>
-        <p:txBody>
-          <a:bodyPr/>
-          <a:lstStyle/>
-          <a:p>
-            <a:endParaRPr lang="en-GB"/>
+            <a:endParaRPr lang="en-GB">
+              <a:latin typeface="Calibri" panose="020F0502020204030204" pitchFamily="34" charset="0"/>
+            </a:endParaRPr>
           </a:p>
         </p:txBody>
       </p:sp>
@@ -7750,13 +6153,17 @@
               <a:defRPr/>
             </a:pPr>
             <a:fld id="{1D1043DC-2681-49D5-9D69-158B3FA3398E}" type="slidenum">
-              <a:rPr lang="en-GB" noProof="1" smtClean="0"/>
+              <a:rPr lang="en-GB" noProof="1" smtClean="0">
+                <a:latin typeface="Calibri" panose="020F0502020204030204" pitchFamily="34" charset="0"/>
+              </a:rPr>
               <a:pPr>
                 <a:defRPr/>
               </a:pPr>
               <a:t>4</a:t>
             </a:fld>
-            <a:endParaRPr lang="en-GB" noProof="1"/>
+            <a:endParaRPr lang="en-GB" noProof="1">
+              <a:latin typeface="Calibri" panose="020F0502020204030204" pitchFamily="34" charset="0"/>
+            </a:endParaRPr>
           </a:p>
         </p:txBody>
       </p:sp>
@@ -7776,199 +6183,20 @@
           <a:lstStyle/>
           <a:p>
             <a:r>
-              <a:rPr lang="en-GB" dirty="0" smtClean="0"/>
-              <a:t>If they don't work, try this</a:t>
-            </a:r>
-            <a:endParaRPr lang="en-GB" dirty="0"/>
-          </a:p>
-        </p:txBody>
-      </p:sp>
-      <p:sp>
-        <p:nvSpPr>
-          <p:cNvPr id="8" name="Content Placeholder 7"/>
-          <p:cNvSpPr>
-            <a:spLocks noGrp="1"/>
-          </p:cNvSpPr>
-          <p:nvPr>
-            <p:ph sz="quarter" idx="15"/>
-          </p:nvPr>
-        </p:nvSpPr>
-        <p:spPr/>
-        <p:txBody>
-          <a:bodyPr/>
-          <a:lstStyle/>
-          <a:p>
-            <a:pPr marL="0" indent="0" algn="ctr">
-              <a:buNone/>
-            </a:pPr>
-            <a:r>
-              <a:rPr lang="en-US" sz="9600" dirty="0" smtClean="0">
-                <a:hlinkClick r:id="rId2"/>
+              <a:rPr lang="en-GB" dirty="0" smtClean="0">
+                <a:latin typeface="Calibri" panose="020F0502020204030204" pitchFamily="34" charset="0"/>
               </a:rPr>
-              <a:t>goo.gl/wH9s3t</a:t>
-            </a:r>
-            <a:endParaRPr lang="en-US" sz="9600" dirty="0"/>
-          </a:p>
-        </p:txBody>
-      </p:sp>
-      <p:pic>
-        <p:nvPicPr>
-          <p:cNvPr id="3074" name="Picture 2" descr="https://goo.gl/wH9s3t.qr"/>
-          <p:cNvPicPr>
-            <a:picLocks noChangeAspect="1" noChangeArrowheads="1"/>
-          </p:cNvPicPr>
-          <p:nvPr/>
-        </p:nvPicPr>
-        <p:blipFill>
-          <a:blip r:embed="rId3">
-            <a:extLst>
-              <a:ext uri="{28A0092B-C50C-407E-A947-70E740481C1C}">
-                <a14:useLocalDpi xmlns:a14="http://schemas.microsoft.com/office/drawing/2010/main" val="0"/>
-              </a:ext>
-            </a:extLst>
-          </a:blip>
-          <a:srcRect/>
-          <a:stretch>
-            <a:fillRect/>
-          </a:stretch>
-        </p:blipFill>
-        <p:spPr bwMode="auto">
-          <a:xfrm>
-            <a:off x="3132000" y="3040815"/>
-            <a:ext cx="2880000" cy="2880000"/>
-          </a:xfrm>
-          <a:prstGeom prst="rect">
-            <a:avLst/>
-          </a:prstGeom>
-          <a:noFill/>
-          <a:extLst>
-            <a:ext uri="{909E8E84-426E-40DD-AFC4-6F175D3DCCD1}">
-              <a14:hiddenFill xmlns:a14="http://schemas.microsoft.com/office/drawing/2010/main">
-                <a:solidFill>
-                  <a:srgbClr val="FFFFFF"/>
-                </a:solidFill>
-              </a14:hiddenFill>
-            </a:ext>
-          </a:extLst>
-        </p:spPr>
-      </p:pic>
-    </p:spTree>
-    <p:extLst>
-      <p:ext uri="{BB962C8B-B14F-4D97-AF65-F5344CB8AC3E}">
-        <p14:creationId xmlns:p14="http://schemas.microsoft.com/office/powerpoint/2010/main" val="2899060834"/>
-      </p:ext>
-    </p:extLst>
-  </p:cSld>
-  <p:clrMapOvr>
-    <a:masterClrMapping/>
-  </p:clrMapOvr>
-</p:sld>
-</file>
-
-<file path=ppt/slides/slide5.xml><?xml version="1.0" encoding="utf-8"?>
-<p:sld xmlns:a="http://schemas.openxmlformats.org/drawingml/2006/main" xmlns:r="http://schemas.openxmlformats.org/officeDocument/2006/relationships" xmlns:p="http://schemas.openxmlformats.org/presentationml/2006/main">
-  <p:cSld>
-    <p:spTree>
-      <p:nvGrpSpPr>
-        <p:cNvPr id="1" name=""/>
-        <p:cNvGrpSpPr/>
-        <p:nvPr/>
-      </p:nvGrpSpPr>
-      <p:grpSpPr>
-        <a:xfrm>
-          <a:off x="0" y="0"/>
-          <a:ext cx="0" cy="0"/>
-          <a:chOff x="0" y="0"/>
-          <a:chExt cx="0" cy="0"/>
-        </a:xfrm>
-      </p:grpSpPr>
-      <p:sp>
-        <p:nvSpPr>
-          <p:cNvPr id="2" name="Text Placeholder 1"/>
-          <p:cNvSpPr>
-            <a:spLocks noGrp="1"/>
-          </p:cNvSpPr>
-          <p:nvPr>
-            <p:ph type="body" sz="quarter" idx="12"/>
-          </p:nvPr>
-        </p:nvSpPr>
-        <p:spPr/>
-        <p:txBody>
-          <a:bodyPr/>
-          <a:lstStyle/>
-          <a:p>
-            <a:endParaRPr lang="en-GB"/>
-          </a:p>
-        </p:txBody>
-      </p:sp>
-      <p:sp>
-        <p:nvSpPr>
-          <p:cNvPr id="3" name="Text Placeholder 2"/>
-          <p:cNvSpPr>
-            <a:spLocks noGrp="1"/>
-          </p:cNvSpPr>
-          <p:nvPr>
-            <p:ph type="body" sz="quarter" idx="16"/>
-          </p:nvPr>
-        </p:nvSpPr>
-        <p:spPr/>
-        <p:txBody>
-          <a:bodyPr/>
-          <a:lstStyle/>
-          <a:p>
-            <a:endParaRPr lang="en-GB"/>
-          </a:p>
-        </p:txBody>
-      </p:sp>
-      <p:sp>
-        <p:nvSpPr>
-          <p:cNvPr id="4" name="Slide Number Placeholder 3"/>
-          <p:cNvSpPr>
-            <a:spLocks noGrp="1"/>
-          </p:cNvSpPr>
-          <p:nvPr>
-            <p:ph type="sldNum" sz="quarter" idx="11"/>
-          </p:nvPr>
-        </p:nvSpPr>
-        <p:spPr/>
-        <p:txBody>
-          <a:bodyPr/>
-          <a:lstStyle/>
-          <a:p>
-            <a:pPr>
-              <a:defRPr/>
-            </a:pPr>
-            <a:fld id="{1D1043DC-2681-49D5-9D69-158B3FA3398E}" type="slidenum">
-              <a:rPr lang="en-GB" noProof="1" smtClean="0"/>
-              <a:pPr>
-                <a:defRPr/>
-              </a:pPr>
-              <a:t>5</a:t>
-            </a:fld>
-            <a:endParaRPr lang="en-GB" noProof="1"/>
-          </a:p>
-        </p:txBody>
-      </p:sp>
-      <p:sp>
-        <p:nvSpPr>
-          <p:cNvPr id="6" name="Title 5"/>
-          <p:cNvSpPr>
-            <a:spLocks noGrp="1"/>
-          </p:cNvSpPr>
-          <p:nvPr>
-            <p:ph type="title"/>
-          </p:nvPr>
-        </p:nvSpPr>
-        <p:spPr/>
-        <p:txBody>
-          <a:bodyPr/>
-          <a:lstStyle/>
-          <a:p>
-            <a:r>
-              <a:rPr lang="en-GB" dirty="0" smtClean="0"/>
-              <a:t>Or this</a:t>
-            </a:r>
-            <a:endParaRPr lang="en-GB" dirty="0"/>
+              <a:t>Or </a:t>
+            </a:r>
+            <a:r>
+              <a:rPr lang="en-GB" dirty="0" smtClean="0">
+                <a:latin typeface="Calibri" panose="020F0502020204030204" pitchFamily="34" charset="0"/>
+              </a:rPr>
+              <a:t>simply open this</a:t>
+            </a:r>
+            <a:endParaRPr lang="en-GB" dirty="0">
+              <a:latin typeface="Calibri" panose="020F0502020204030204" pitchFamily="34" charset="0"/>
+            </a:endParaRPr>
           </a:p>
         </p:txBody>
       </p:sp>
@@ -7981,7 +6209,7 @@
           <p:nvPr>
             <p:extLst>
               <p:ext uri="{D42A27DB-BD31-4B8C-83A1-F6EECF244321}">
-                <p14:modId xmlns:p14="http://schemas.microsoft.com/office/powerpoint/2010/main" val="4165872896"/>
+                <p14:modId xmlns:p14="http://schemas.microsoft.com/office/powerpoint/2010/main" val="4067391452"/>
               </p:ext>
             </p:extLst>
           </p:nvPr>
@@ -7994,7 +6222,7 @@
           <a:graphicData uri="http://schemas.openxmlformats.org/presentationml/2006/ole">
             <mc:AlternateContent xmlns:mc="http://schemas.openxmlformats.org/markup-compatibility/2006">
               <mc:Choice xmlns:v="urn:schemas-microsoft-com:vml" Requires="v">
-                <p:oleObj spid="_x0000_s1028" name="Packager Shell Object" showAsIcon="1" r:id="rId3" imgW="2388960" imgH="685080" progId="Package">
+                <p:oleObj spid="_x0000_s1035" name="Packager Shell Object" showAsIcon="1" r:id="rId3" imgW="2388960" imgH="685080" progId="Package">
                   <p:embed/>
                 </p:oleObj>
               </mc:Choice>
@@ -8346,7 +6574,7 @@
   <a:extraClrSchemeLst/>
   <a:extLst>
     <a:ext uri="{05A4C25C-085E-4340-85A3-A5531E510DB2}">
-      <thm15:themeFamily xmlns:thm15="http://schemas.microsoft.com/office/thememl/2012/main" xmlns="" name="UniCredit_4_3.potx" id="{3B308D82-0A1A-4596-9552-0D004D502A7F}" vid="{740313D7-B2BC-4B8B-A9B4-9C7B7B4F5C5F}"/>
+      <thm15:themeFamily xmlns="" xmlns:thm15="http://schemas.microsoft.com/office/thememl/2012/main" name="UniCredit_4_3.potx" id="{3B308D82-0A1A-4596-9552-0D004D502A7F}" vid="{740313D7-B2BC-4B8B-A9B4-9C7B7B4F5C5F}"/>
     </a:ext>
   </a:extLst>
 </a:theme>
@@ -8607,19 +6835,16 @@
   <a:extraClrSchemeLst/>
   <a:extLst>
     <a:ext uri="{05A4C25C-085E-4340-85A3-A5531E510DB2}">
-      <thm15:themeFamily xmlns:thm15="http://schemas.microsoft.com/office/thememl/2012/main" xmlns="" name="Office Theme" id="{62F939B6-93AF-4DB8-9C6B-D6C7DFDC589F}" vid="{4A3C46E8-61CC-4603-A589-7422A47A8E4A}"/>
+      <thm15:themeFamily xmlns="" xmlns:thm15="http://schemas.microsoft.com/office/thememl/2012/main" name="Office Theme" id="{62F939B6-93AF-4DB8-9C6B-D6C7DFDC589F}" vid="{4A3C46E8-61CC-4603-A589-7422A47A8E4A}"/>
     </a:ext>
   </a:extLst>
 </a:theme>
 </file>
 
 <file path=customXml/item1.xml><?xml version="1.0" encoding="utf-8"?>
-<?mso-contentType ?>
-<FormTemplates xmlns="http://schemas.microsoft.com/sharepoint/v3/contenttype/forms">
-  <Display>DocumentLibraryForm</Display>
-  <Edit>DocumentLibraryForm</Edit>
-  <New>DocumentLibraryForm</New>
-</FormTemplates>
+<p:properties xmlns:p="http://schemas.microsoft.com/office/2006/metadata/properties" xmlns:xsi="http://www.w3.org/2001/XMLSchema-instance">
+  <documentManagement/>
+</p:properties>
 </file>
 
 <file path=customXml/item2.xml><?xml version="1.0" encoding="utf-8"?>
@@ -8672,15 +6897,24 @@
 </file>
 
 <file path=customXml/item3.xml><?xml version="1.0" encoding="utf-8"?>
-<p:properties xmlns:p="http://schemas.microsoft.com/office/2006/metadata/properties" xmlns:xsi="http://www.w3.org/2001/XMLSchema-instance">
-  <documentManagement/>
-</p:properties>
+<?mso-contentType ?>
+<FormTemplates xmlns="http://schemas.microsoft.com/sharepoint/v3/contenttype/forms">
+  <Display>DocumentLibraryForm</Display>
+  <Edit>DocumentLibraryForm</Edit>
+  <New>DocumentLibraryForm</New>
+</FormTemplates>
 </file>
 
 <file path=customXml/itemProps1.xml><?xml version="1.0" encoding="utf-8"?>
-<ds:datastoreItem xmlns:ds="http://schemas.openxmlformats.org/officeDocument/2006/customXml" ds:itemID="{434BFED0-AF3A-425B-A3DF-D1FE9B25164C}">
+<ds:datastoreItem xmlns:ds="http://schemas.openxmlformats.org/officeDocument/2006/customXml" ds:itemID="{BD82C2DB-D42D-4D9F-A730-8F802D302C9A}">
   <ds:schemaRefs>
-    <ds:schemaRef ds:uri="http://schemas.microsoft.com/sharepoint/v3/contenttype/forms"/>
+    <ds:schemaRef ds:uri="http://schemas.openxmlformats.org/package/2006/metadata/core-properties"/>
+    <ds:schemaRef ds:uri="http://schemas.microsoft.com/office/2006/documentManagement/types"/>
+    <ds:schemaRef ds:uri="http://www.w3.org/XML/1998/namespace"/>
+    <ds:schemaRef ds:uri="http://purl.org/dc/elements/1.1/"/>
+    <ds:schemaRef ds:uri="http://schemas.microsoft.com/office/2006/metadata/properties"/>
+    <ds:schemaRef ds:uri="http://purl.org/dc/terms/"/>
+    <ds:schemaRef ds:uri="http://purl.org/dc/dcmitype/"/>
   </ds:schemaRefs>
 </ds:datastoreItem>
 </file>
@@ -8701,15 +6935,9 @@
 </file>
 
 <file path=customXml/itemProps3.xml><?xml version="1.0" encoding="utf-8"?>
-<ds:datastoreItem xmlns:ds="http://schemas.openxmlformats.org/officeDocument/2006/customXml" ds:itemID="{BD82C2DB-D42D-4D9F-A730-8F802D302C9A}">
+<ds:datastoreItem xmlns:ds="http://schemas.openxmlformats.org/officeDocument/2006/customXml" ds:itemID="{434BFED0-AF3A-425B-A3DF-D1FE9B25164C}">
   <ds:schemaRefs>
-    <ds:schemaRef ds:uri="http://schemas.openxmlformats.org/package/2006/metadata/core-properties"/>
-    <ds:schemaRef ds:uri="http://schemas.microsoft.com/office/2006/documentManagement/types"/>
-    <ds:schemaRef ds:uri="http://www.w3.org/XML/1998/namespace"/>
-    <ds:schemaRef ds:uri="http://purl.org/dc/elements/1.1/"/>
-    <ds:schemaRef ds:uri="http://schemas.microsoft.com/office/2006/metadata/properties"/>
-    <ds:schemaRef ds:uri="http://purl.org/dc/terms/"/>
-    <ds:schemaRef ds:uri="http://purl.org/dc/dcmitype/"/>
+    <ds:schemaRef ds:uri="http://schemas.microsoft.com/sharepoint/v3/contenttype/forms"/>
   </ds:schemaRefs>
 </ds:datastoreItem>
 </file>